--- a/Новое начало/Время партнёрских конструкций — внутренняя презентация (v2).pptx
+++ b/Новое начало/Время партнёрских конструкций — внутренняя презентация (v2).pptx
@@ -3945,8 +3945,8 @@
         </p:nvSpPr>
         <p:spPr>
           <a:xfrm>
-            <a:off x="3017520" y="1591056"/>
-            <a:ext cx="1280160" cy="201168"/>
+            <a:off x="3063240" y="1572768"/>
+            <a:ext cx="1097280" cy="237744"/>
           </a:xfrm>
           <a:prstGeom prst="rect">
             <a:avLst/>
@@ -3984,8 +3984,8 @@
         </p:nvSpPr>
         <p:spPr>
           <a:xfrm>
-            <a:off x="3017520" y="2029968"/>
-            <a:ext cx="1280160" cy="182880"/>
+            <a:off x="3063240" y="2039112"/>
+            <a:ext cx="1097280" cy="237744"/>
           </a:xfrm>
           <a:prstGeom prst="rect">
             <a:avLst/>
@@ -4394,8 +4394,8 @@
         </p:nvSpPr>
         <p:spPr>
           <a:xfrm>
-            <a:off x="6949440" y="2331720"/>
-            <a:ext cx="1554480" cy="365760"/>
+            <a:off x="6995160" y="2331720"/>
+            <a:ext cx="1508760" cy="365760"/>
           </a:xfrm>
           <a:prstGeom prst="rect">
             <a:avLst/>
@@ -8139,8 +8139,8 @@
         </p:nvSpPr>
         <p:spPr>
           <a:xfrm>
-            <a:off x="594360" y="3593591"/>
-            <a:ext cx="1828800" cy="201168"/>
+            <a:off x="731519" y="3593591"/>
+            <a:ext cx="1554480" cy="219456"/>
           </a:xfrm>
           <a:prstGeom prst="rect">
             <a:avLst/>
@@ -8174,8 +8174,8 @@
         </p:nvSpPr>
         <p:spPr>
           <a:xfrm>
-            <a:off x="2331720" y="3593591"/>
-            <a:ext cx="1828800" cy="201168"/>
+            <a:off x="2468879" y="3593591"/>
+            <a:ext cx="1554480" cy="219456"/>
           </a:xfrm>
           <a:prstGeom prst="rect">
             <a:avLst/>
@@ -10737,8 +10737,8 @@
         </p:nvSpPr>
         <p:spPr>
           <a:xfrm>
-            <a:off x="640080" y="1188720"/>
-            <a:ext cx="822960" cy="1005840"/>
+            <a:off x="640080" y="1417320"/>
+            <a:ext cx="777240" cy="914400"/>
           </a:xfrm>
           <a:prstGeom prst="rect">
             <a:avLst/>
@@ -11048,8 +11048,8 @@
         </p:nvSpPr>
         <p:spPr>
           <a:xfrm>
-            <a:off x="640080" y="1463040"/>
-            <a:ext cx="7863840" cy="310896"/>
+            <a:off x="640080" y="1426464"/>
+            <a:ext cx="7863840" cy="274320"/>
           </a:xfrm>
           <a:prstGeom prst="rect">
             <a:avLst/>
@@ -11092,8 +11092,8 @@
         </p:nvSpPr>
         <p:spPr>
           <a:xfrm>
-            <a:off x="640080" y="1463040"/>
-            <a:ext cx="310896" cy="310896"/>
+            <a:off x="640080" y="1426464"/>
+            <a:ext cx="274320" cy="274320"/>
           </a:xfrm>
           <a:prstGeom prst="rect">
             <a:avLst/>
@@ -11136,8 +11136,8 @@
         </p:nvSpPr>
         <p:spPr>
           <a:xfrm>
-            <a:off x="640080" y="1463040"/>
-            <a:ext cx="310896" cy="310896"/>
+            <a:off x="640080" y="1426464"/>
+            <a:ext cx="274320" cy="274320"/>
           </a:xfrm>
           <a:prstGeom prst="rect">
             <a:avLst/>
@@ -11171,8 +11171,8 @@
         </p:nvSpPr>
         <p:spPr>
           <a:xfrm>
-            <a:off x="1078992" y="1463040"/>
-            <a:ext cx="7424927" cy="310896"/>
+            <a:off x="1042416" y="1426464"/>
+            <a:ext cx="7461503" cy="274320"/>
           </a:xfrm>
           <a:prstGeom prst="rect">
             <a:avLst/>
@@ -11206,8 +11206,8 @@
         </p:nvSpPr>
         <p:spPr>
           <a:xfrm>
-            <a:off x="640080" y="1847088"/>
-            <a:ext cx="1874519" cy="868680"/>
+            <a:off x="640080" y="1755648"/>
+            <a:ext cx="1874519" cy="822960"/>
           </a:xfrm>
           <a:prstGeom prst="rect">
             <a:avLst/>
@@ -11250,7 +11250,7 @@
         </p:nvSpPr>
         <p:spPr>
           <a:xfrm>
-            <a:off x="640080" y="1847088"/>
+            <a:off x="640080" y="1755648"/>
             <a:ext cx="1874519" cy="41148"/>
           </a:xfrm>
           <a:prstGeom prst="rect">
@@ -11294,8 +11294,8 @@
         </p:nvSpPr>
         <p:spPr>
           <a:xfrm>
-            <a:off x="749808" y="1956816"/>
-            <a:ext cx="1655063" cy="365760"/>
+            <a:off x="749808" y="1847088"/>
+            <a:ext cx="1655063" cy="292608"/>
           </a:xfrm>
           <a:prstGeom prst="rect">
             <a:avLst/>
@@ -11333,8 +11333,8 @@
         </p:nvSpPr>
         <p:spPr>
           <a:xfrm>
-            <a:off x="749808" y="2404872"/>
-            <a:ext cx="1655063" cy="256032"/>
+            <a:off x="749808" y="2185415"/>
+            <a:ext cx="1655063" cy="320040"/>
           </a:xfrm>
           <a:prstGeom prst="rect">
             <a:avLst/>
@@ -11349,7 +11349,7 @@
           <a:p>
             <a:pPr algn="l">
               <a:lnSpc>
-                <a:spcPct val="100000"/>
+                <a:spcPct val="105000"/>
               </a:lnSpc>
             </a:pPr>
             <a:r>
@@ -11372,8 +11372,8 @@
         </p:nvSpPr>
         <p:spPr>
           <a:xfrm>
-            <a:off x="2633472" y="1847088"/>
-            <a:ext cx="1874519" cy="868680"/>
+            <a:off x="2633472" y="1755648"/>
+            <a:ext cx="1874519" cy="822960"/>
           </a:xfrm>
           <a:prstGeom prst="rect">
             <a:avLst/>
@@ -11416,7 +11416,7 @@
         </p:nvSpPr>
         <p:spPr>
           <a:xfrm>
-            <a:off x="2633472" y="1847088"/>
+            <a:off x="2633472" y="1755648"/>
             <a:ext cx="1874519" cy="41148"/>
           </a:xfrm>
           <a:prstGeom prst="rect">
@@ -11460,8 +11460,8 @@
         </p:nvSpPr>
         <p:spPr>
           <a:xfrm>
-            <a:off x="2743200" y="1956816"/>
-            <a:ext cx="1655063" cy="365760"/>
+            <a:off x="2743200" y="1847088"/>
+            <a:ext cx="1655063" cy="292608"/>
           </a:xfrm>
           <a:prstGeom prst="rect">
             <a:avLst/>
@@ -11499,8 +11499,8 @@
         </p:nvSpPr>
         <p:spPr>
           <a:xfrm>
-            <a:off x="2743200" y="2404872"/>
-            <a:ext cx="1655063" cy="256032"/>
+            <a:off x="2743200" y="2185415"/>
+            <a:ext cx="1655063" cy="320040"/>
           </a:xfrm>
           <a:prstGeom prst="rect">
             <a:avLst/>
@@ -11515,7 +11515,7 @@
           <a:p>
             <a:pPr algn="l">
               <a:lnSpc>
-                <a:spcPct val="100000"/>
+                <a:spcPct val="105000"/>
               </a:lnSpc>
             </a:pPr>
             <a:r>
@@ -11538,8 +11538,8 @@
         </p:nvSpPr>
         <p:spPr>
           <a:xfrm>
-            <a:off x="4626864" y="1847088"/>
-            <a:ext cx="1874519" cy="868680"/>
+            <a:off x="4626864" y="1755648"/>
+            <a:ext cx="1874519" cy="822960"/>
           </a:xfrm>
           <a:prstGeom prst="rect">
             <a:avLst/>
@@ -11582,7 +11582,7 @@
         </p:nvSpPr>
         <p:spPr>
           <a:xfrm>
-            <a:off x="4626864" y="1847088"/>
+            <a:off x="4626864" y="1755648"/>
             <a:ext cx="1874519" cy="41148"/>
           </a:xfrm>
           <a:prstGeom prst="rect">
@@ -11626,8 +11626,8 @@
         </p:nvSpPr>
         <p:spPr>
           <a:xfrm>
-            <a:off x="4736592" y="1956816"/>
-            <a:ext cx="1655063" cy="365760"/>
+            <a:off x="4736592" y="1847088"/>
+            <a:ext cx="1655063" cy="292608"/>
           </a:xfrm>
           <a:prstGeom prst="rect">
             <a:avLst/>
@@ -11665,8 +11665,8 @@
         </p:nvSpPr>
         <p:spPr>
           <a:xfrm>
-            <a:off x="4736592" y="2404872"/>
-            <a:ext cx="1655063" cy="256032"/>
+            <a:off x="4736592" y="2185415"/>
+            <a:ext cx="1655063" cy="320040"/>
           </a:xfrm>
           <a:prstGeom prst="rect">
             <a:avLst/>
@@ -11681,7 +11681,7 @@
           <a:p>
             <a:pPr algn="l">
               <a:lnSpc>
-                <a:spcPct val="100000"/>
+                <a:spcPct val="105000"/>
               </a:lnSpc>
             </a:pPr>
             <a:r>
@@ -11704,8 +11704,8 @@
         </p:nvSpPr>
         <p:spPr>
           <a:xfrm>
-            <a:off x="6620255" y="1847088"/>
-            <a:ext cx="1874519" cy="868680"/>
+            <a:off x="6620255" y="1755648"/>
+            <a:ext cx="1874519" cy="822960"/>
           </a:xfrm>
           <a:prstGeom prst="rect">
             <a:avLst/>
@@ -11748,7 +11748,7 @@
         </p:nvSpPr>
         <p:spPr>
           <a:xfrm>
-            <a:off x="6620255" y="1847088"/>
+            <a:off x="6620255" y="1755648"/>
             <a:ext cx="1874519" cy="41148"/>
           </a:xfrm>
           <a:prstGeom prst="rect">
@@ -11792,8 +11792,8 @@
         </p:nvSpPr>
         <p:spPr>
           <a:xfrm>
-            <a:off x="6729983" y="1956816"/>
-            <a:ext cx="1655063" cy="365760"/>
+            <a:off x="6729983" y="1847088"/>
+            <a:ext cx="1655063" cy="292608"/>
           </a:xfrm>
           <a:prstGeom prst="rect">
             <a:avLst/>
@@ -11831,8 +11831,8 @@
         </p:nvSpPr>
         <p:spPr>
           <a:xfrm>
-            <a:off x="6729983" y="2404872"/>
-            <a:ext cx="1655063" cy="256032"/>
+            <a:off x="6729983" y="2185415"/>
+            <a:ext cx="1655063" cy="320040"/>
           </a:xfrm>
           <a:prstGeom prst="rect">
             <a:avLst/>
@@ -11847,7 +11847,7 @@
           <a:p>
             <a:pPr algn="l">
               <a:lnSpc>
-                <a:spcPct val="100000"/>
+                <a:spcPct val="105000"/>
               </a:lnSpc>
             </a:pPr>
             <a:r>
@@ -11870,8 +11870,8 @@
         </p:nvSpPr>
         <p:spPr>
           <a:xfrm>
-            <a:off x="640080" y="2788920"/>
-            <a:ext cx="7863840" cy="310896"/>
+            <a:off x="640080" y="2633472"/>
+            <a:ext cx="7863840" cy="274320"/>
           </a:xfrm>
           <a:prstGeom prst="rect">
             <a:avLst/>
@@ -11914,8 +11914,8 @@
         </p:nvSpPr>
         <p:spPr>
           <a:xfrm>
-            <a:off x="640080" y="2788920"/>
-            <a:ext cx="310896" cy="310896"/>
+            <a:off x="640080" y="2633472"/>
+            <a:ext cx="274320" cy="274320"/>
           </a:xfrm>
           <a:prstGeom prst="rect">
             <a:avLst/>
@@ -11958,8 +11958,8 @@
         </p:nvSpPr>
         <p:spPr>
           <a:xfrm>
-            <a:off x="640080" y="2788920"/>
-            <a:ext cx="310896" cy="310896"/>
+            <a:off x="640080" y="2633472"/>
+            <a:ext cx="274320" cy="274320"/>
           </a:xfrm>
           <a:prstGeom prst="rect">
             <a:avLst/>
@@ -11993,8 +11993,8 @@
         </p:nvSpPr>
         <p:spPr>
           <a:xfrm>
-            <a:off x="1078992" y="2788920"/>
-            <a:ext cx="7424927" cy="310896"/>
+            <a:off x="1042416" y="2633472"/>
+            <a:ext cx="7461503" cy="274320"/>
           </a:xfrm>
           <a:prstGeom prst="rect">
             <a:avLst/>
@@ -12028,8 +12028,8 @@
         </p:nvSpPr>
         <p:spPr>
           <a:xfrm>
-            <a:off x="640080" y="3172968"/>
-            <a:ext cx="2532888" cy="594360"/>
+            <a:off x="640080" y="2962656"/>
+            <a:ext cx="2532888" cy="960120"/>
           </a:xfrm>
           <a:prstGeom prst="rect">
             <a:avLst/>
@@ -12072,7 +12072,7 @@
         </p:nvSpPr>
         <p:spPr>
           <a:xfrm>
-            <a:off x="640080" y="3172968"/>
+            <a:off x="640080" y="2962656"/>
             <a:ext cx="2532888" cy="41148"/>
           </a:xfrm>
           <a:prstGeom prst="rect">
@@ -12116,8 +12116,8 @@
         </p:nvSpPr>
         <p:spPr>
           <a:xfrm>
-            <a:off x="749808" y="3282696"/>
-            <a:ext cx="2313432" cy="365760"/>
+            <a:off x="749808" y="3054096"/>
+            <a:ext cx="2313432" cy="292608"/>
           </a:xfrm>
           <a:prstGeom prst="rect">
             <a:avLst/>
@@ -12155,8 +12155,8 @@
         </p:nvSpPr>
         <p:spPr>
           <a:xfrm>
-            <a:off x="749808" y="3456432"/>
-            <a:ext cx="2313432" cy="256032"/>
+            <a:off x="749808" y="3392424"/>
+            <a:ext cx="2313432" cy="457200"/>
           </a:xfrm>
           <a:prstGeom prst="rect">
             <a:avLst/>
@@ -12171,7 +12171,7 @@
           <a:p>
             <a:pPr algn="l">
               <a:lnSpc>
-                <a:spcPct val="100000"/>
+                <a:spcPct val="105000"/>
               </a:lnSpc>
             </a:pPr>
             <a:r>
@@ -12194,8 +12194,8 @@
         </p:nvSpPr>
         <p:spPr>
           <a:xfrm>
-            <a:off x="3305556" y="3172968"/>
-            <a:ext cx="2532888" cy="594360"/>
+            <a:off x="3305556" y="2962656"/>
+            <a:ext cx="2532888" cy="960120"/>
           </a:xfrm>
           <a:prstGeom prst="rect">
             <a:avLst/>
@@ -12238,7 +12238,7 @@
         </p:nvSpPr>
         <p:spPr>
           <a:xfrm>
-            <a:off x="3305556" y="3172968"/>
+            <a:off x="3305556" y="2962656"/>
             <a:ext cx="2532888" cy="41148"/>
           </a:xfrm>
           <a:prstGeom prst="rect">
@@ -12282,8 +12282,8 @@
         </p:nvSpPr>
         <p:spPr>
           <a:xfrm>
-            <a:off x="3415284" y="3282696"/>
-            <a:ext cx="2313432" cy="365760"/>
+            <a:off x="3415284" y="3054096"/>
+            <a:ext cx="2313432" cy="292608"/>
           </a:xfrm>
           <a:prstGeom prst="rect">
             <a:avLst/>
@@ -12321,8 +12321,8 @@
         </p:nvSpPr>
         <p:spPr>
           <a:xfrm>
-            <a:off x="3415284" y="3456432"/>
-            <a:ext cx="2313432" cy="256032"/>
+            <a:off x="3415284" y="3392424"/>
+            <a:ext cx="2313432" cy="457200"/>
           </a:xfrm>
           <a:prstGeom prst="rect">
             <a:avLst/>
@@ -12337,7 +12337,7 @@
           <a:p>
             <a:pPr algn="l">
               <a:lnSpc>
-                <a:spcPct val="100000"/>
+                <a:spcPct val="105000"/>
               </a:lnSpc>
             </a:pPr>
             <a:r>
@@ -12360,8 +12360,8 @@
         </p:nvSpPr>
         <p:spPr>
           <a:xfrm>
-            <a:off x="5971032" y="3172968"/>
-            <a:ext cx="2532888" cy="594360"/>
+            <a:off x="5971032" y="2962656"/>
+            <a:ext cx="2532888" cy="960120"/>
           </a:xfrm>
           <a:prstGeom prst="rect">
             <a:avLst/>
@@ -12404,7 +12404,7 @@
         </p:nvSpPr>
         <p:spPr>
           <a:xfrm>
-            <a:off x="5971032" y="3172968"/>
+            <a:off x="5971032" y="2962656"/>
             <a:ext cx="2532888" cy="41148"/>
           </a:xfrm>
           <a:prstGeom prst="rect">
@@ -12448,8 +12448,8 @@
         </p:nvSpPr>
         <p:spPr>
           <a:xfrm>
-            <a:off x="6080760" y="3282696"/>
-            <a:ext cx="2313432" cy="365760"/>
+            <a:off x="6080760" y="3054096"/>
+            <a:ext cx="2313432" cy="292608"/>
           </a:xfrm>
           <a:prstGeom prst="rect">
             <a:avLst/>
@@ -12487,8 +12487,8 @@
         </p:nvSpPr>
         <p:spPr>
           <a:xfrm>
-            <a:off x="6080760" y="3456432"/>
-            <a:ext cx="2313432" cy="256032"/>
+            <a:off x="6080760" y="3392424"/>
+            <a:ext cx="2313432" cy="457200"/>
           </a:xfrm>
           <a:prstGeom prst="rect">
             <a:avLst/>
@@ -12503,7 +12503,7 @@
           <a:p>
             <a:pPr algn="l">
               <a:lnSpc>
-                <a:spcPct val="100000"/>
+                <a:spcPct val="105000"/>
               </a:lnSpc>
             </a:pPr>
             <a:r>
@@ -12526,8 +12526,8 @@
         </p:nvSpPr>
         <p:spPr>
           <a:xfrm>
-            <a:off x="640080" y="3950208"/>
-            <a:ext cx="7863840" cy="347472"/>
+            <a:off x="640080" y="3977639"/>
+            <a:ext cx="7863840" cy="320040"/>
           </a:xfrm>
           <a:prstGeom prst="rect">
             <a:avLst/>
@@ -12570,8 +12570,8 @@
         </p:nvSpPr>
         <p:spPr>
           <a:xfrm>
-            <a:off x="640080" y="3950208"/>
-            <a:ext cx="54864" cy="347472"/>
+            <a:off x="640080" y="3977639"/>
+            <a:ext cx="54864" cy="320040"/>
           </a:xfrm>
           <a:prstGeom prst="rect">
             <a:avLst/>
@@ -12614,8 +12614,8 @@
         </p:nvSpPr>
         <p:spPr>
           <a:xfrm>
-            <a:off x="868680" y="3950208"/>
-            <a:ext cx="7498079" cy="347472"/>
+            <a:off x="868680" y="3977639"/>
+            <a:ext cx="7498079" cy="320040"/>
           </a:xfrm>
           <a:prstGeom prst="rect">
             <a:avLst/>

--- a/Новое начало/Время партнёрских конструкций — внутренняя презентация (v2).pptx
+++ b/Новое начало/Время партнёрских конструкций — внутренняя презентация (v2).pptx
@@ -9920,7 +9920,7 @@
         <p:spPr>
           <a:xfrm>
             <a:off x="768096" y="1591056"/>
-            <a:ext cx="502920" cy="292608"/>
+            <a:ext cx="457200" cy="292608"/>
           </a:xfrm>
           <a:prstGeom prst="rect">
             <a:avLst/>
@@ -9954,8 +9954,8 @@
         </p:nvSpPr>
         <p:spPr>
           <a:xfrm>
-            <a:off x="1243584" y="1609344"/>
-            <a:ext cx="1920239" cy="292608"/>
+            <a:off x="1298448" y="1609344"/>
+            <a:ext cx="1865375" cy="292608"/>
           </a:xfrm>
           <a:prstGeom prst="rect">
             <a:avLst/>
@@ -10073,7 +10073,7 @@
         <p:spPr>
           <a:xfrm>
             <a:off x="768096" y="2505456"/>
-            <a:ext cx="502920" cy="292608"/>
+            <a:ext cx="457200" cy="292608"/>
           </a:xfrm>
           <a:prstGeom prst="rect">
             <a:avLst/>
@@ -10107,8 +10107,8 @@
         </p:nvSpPr>
         <p:spPr>
           <a:xfrm>
-            <a:off x="1243584" y="2523744"/>
-            <a:ext cx="1920239" cy="292608"/>
+            <a:off x="1298448" y="2523744"/>
+            <a:ext cx="1865375" cy="292608"/>
           </a:xfrm>
           <a:prstGeom prst="rect">
             <a:avLst/>
@@ -10226,7 +10226,7 @@
         <p:spPr>
           <a:xfrm>
             <a:off x="768096" y="3419856"/>
-            <a:ext cx="502920" cy="292608"/>
+            <a:ext cx="457200" cy="292608"/>
           </a:xfrm>
           <a:prstGeom prst="rect">
             <a:avLst/>
@@ -10260,8 +10260,8 @@
         </p:nvSpPr>
         <p:spPr>
           <a:xfrm>
-            <a:off x="1243584" y="3438144"/>
-            <a:ext cx="1920239" cy="292608"/>
+            <a:off x="1298448" y="3438144"/>
+            <a:ext cx="1865375" cy="292608"/>
           </a:xfrm>
           <a:prstGeom prst="rect">
             <a:avLst/>

--- a/Новое начало/Время партнёрских конструкций — внутренняя презентация (v2).pptx
+++ b/Новое начало/Время партнёрских конструкций — внутренняя презентация (v2).pptx
@@ -3246,7 +3246,7 @@
           <a:p>
             <a:pPr algn="l"/>
             <a:r>
-              <a:rPr sz="4000" b="1" i="0">
+              <a:rPr sz="3600" b="1" i="0">
                 <a:solidFill>
                   <a:srgbClr val="1A1A1A"/>
                 </a:solidFill>
@@ -3265,7 +3265,7 @@
         </p:nvSpPr>
         <p:spPr>
           <a:xfrm>
-            <a:off x="640080" y="2395728"/>
+            <a:off x="640080" y="2487168"/>
             <a:ext cx="7315200" cy="731520"/>
           </a:xfrm>
           <a:prstGeom prst="rect">
@@ -3305,94 +3305,6 @@
         <p:spPr>
           <a:xfrm>
             <a:off x="640080" y="3429000"/>
-            <a:ext cx="201168" cy="201168"/>
-          </a:xfrm>
-          <a:prstGeom prst="rect">
-            <a:avLst/>
-          </a:prstGeom>
-          <a:solidFill>
-            <a:srgbClr val="1F3A5F"/>
-          </a:solidFill>
-          <a:ln>
-            <a:noFill/>
-          </a:ln>
-          <a:effectLst/>
-        </p:spPr>
-        <p:style>
-          <a:lnRef idx="1">
-            <a:schemeClr val="accent1"/>
-          </a:lnRef>
-          <a:fillRef idx="3">
-            <a:schemeClr val="accent1"/>
-          </a:fillRef>
-          <a:effectRef idx="2">
-            <a:schemeClr val="accent1"/>
-          </a:effectRef>
-          <a:fontRef idx="minor">
-            <a:schemeClr val="lt1"/>
-          </a:fontRef>
-        </p:style>
-        <p:txBody>
-          <a:bodyPr rtlCol="0" anchor="ctr"/>
-          <a:lstStyle/>
-          <a:p>
-            <a:pPr algn="ctr"/>
-          </a:p>
-        </p:txBody>
-      </p:sp>
-      <p:sp>
-        <p:nvSpPr>
-          <p:cNvPr id="8" name="Rectangle 7"/>
-          <p:cNvSpPr/>
-          <p:nvPr/>
-        </p:nvSpPr>
-        <p:spPr>
-          <a:xfrm>
-            <a:off x="950976" y="3429000"/>
-            <a:ext cx="201168" cy="201168"/>
-          </a:xfrm>
-          <a:prstGeom prst="rect">
-            <a:avLst/>
-          </a:prstGeom>
-          <a:solidFill>
-            <a:srgbClr val="1F3A5F"/>
-          </a:solidFill>
-          <a:ln>
-            <a:noFill/>
-          </a:ln>
-          <a:effectLst/>
-        </p:spPr>
-        <p:style>
-          <a:lnRef idx="1">
-            <a:schemeClr val="accent1"/>
-          </a:lnRef>
-          <a:fillRef idx="3">
-            <a:schemeClr val="accent1"/>
-          </a:fillRef>
-          <a:effectRef idx="2">
-            <a:schemeClr val="accent1"/>
-          </a:effectRef>
-          <a:fontRef idx="minor">
-            <a:schemeClr val="lt1"/>
-          </a:fontRef>
-        </p:style>
-        <p:txBody>
-          <a:bodyPr rtlCol="0" anchor="ctr"/>
-          <a:lstStyle/>
-          <a:p>
-            <a:pPr algn="ctr"/>
-          </a:p>
-        </p:txBody>
-      </p:sp>
-      <p:sp>
-        <p:nvSpPr>
-          <p:cNvPr id="9" name="Rectangle 8"/>
-          <p:cNvSpPr/>
-          <p:nvPr/>
-        </p:nvSpPr>
-        <p:spPr>
-          <a:xfrm>
-            <a:off x="1261872" y="3429000"/>
             <a:ext cx="201168" cy="201168"/>
           </a:xfrm>
           <a:prstGeom prst="rect">
@@ -3430,13 +3342,13 @@
       </p:sp>
       <p:sp>
         <p:nvSpPr>
-          <p:cNvPr id="10" name="Rectangle 9"/>
+          <p:cNvPr id="8" name="Rectangle 7"/>
           <p:cNvSpPr/>
           <p:nvPr/>
         </p:nvSpPr>
         <p:spPr>
           <a:xfrm>
-            <a:off x="1572768" y="3429000"/>
+            <a:off x="950976" y="3429000"/>
             <a:ext cx="201168" cy="201168"/>
           </a:xfrm>
           <a:prstGeom prst="rect">
@@ -3474,13 +3386,13 @@
       </p:sp>
       <p:sp>
         <p:nvSpPr>
-          <p:cNvPr id="11" name="Rectangle 10"/>
+          <p:cNvPr id="9" name="Rectangle 8"/>
           <p:cNvSpPr/>
           <p:nvPr/>
         </p:nvSpPr>
         <p:spPr>
           <a:xfrm>
-            <a:off x="1883664" y="3429000"/>
+            <a:off x="1261872" y="3429000"/>
             <a:ext cx="201168" cy="201168"/>
           </a:xfrm>
           <a:prstGeom prst="rect">
@@ -3518,14 +3430,14 @@
       </p:sp>
       <p:sp>
         <p:nvSpPr>
-          <p:cNvPr id="12" name="Rectangle 11"/>
+          <p:cNvPr id="10" name="Rectangle 9"/>
           <p:cNvSpPr/>
           <p:nvPr/>
         </p:nvSpPr>
         <p:spPr>
           <a:xfrm>
-            <a:off x="640080" y="4370832"/>
-            <a:ext cx="7863840" cy="10972"/>
+            <a:off x="1572768" y="3429000"/>
+            <a:ext cx="201168" cy="201168"/>
           </a:xfrm>
           <a:prstGeom prst="rect">
             <a:avLst/>
@@ -3562,6 +3474,94 @@
       </p:sp>
       <p:sp>
         <p:nvSpPr>
+          <p:cNvPr id="11" name="Rectangle 10"/>
+          <p:cNvSpPr/>
+          <p:nvPr/>
+        </p:nvSpPr>
+        <p:spPr>
+          <a:xfrm>
+            <a:off x="1883664" y="3429000"/>
+            <a:ext cx="201168" cy="201168"/>
+          </a:xfrm>
+          <a:prstGeom prst="rect">
+            <a:avLst/>
+          </a:prstGeom>
+          <a:solidFill>
+            <a:srgbClr val="D9D9D9"/>
+          </a:solidFill>
+          <a:ln>
+            <a:noFill/>
+          </a:ln>
+          <a:effectLst/>
+        </p:spPr>
+        <p:style>
+          <a:lnRef idx="1">
+            <a:schemeClr val="accent1"/>
+          </a:lnRef>
+          <a:fillRef idx="3">
+            <a:schemeClr val="accent1"/>
+          </a:fillRef>
+          <a:effectRef idx="2">
+            <a:schemeClr val="accent1"/>
+          </a:effectRef>
+          <a:fontRef idx="minor">
+            <a:schemeClr val="lt1"/>
+          </a:fontRef>
+        </p:style>
+        <p:txBody>
+          <a:bodyPr rtlCol="0" anchor="ctr"/>
+          <a:lstStyle/>
+          <a:p>
+            <a:pPr algn="ctr"/>
+          </a:p>
+        </p:txBody>
+      </p:sp>
+      <p:sp>
+        <p:nvSpPr>
+          <p:cNvPr id="12" name="Rectangle 11"/>
+          <p:cNvSpPr/>
+          <p:nvPr/>
+        </p:nvSpPr>
+        <p:spPr>
+          <a:xfrm>
+            <a:off x="640080" y="4370832"/>
+            <a:ext cx="7863840" cy="10972"/>
+          </a:xfrm>
+          <a:prstGeom prst="rect">
+            <a:avLst/>
+          </a:prstGeom>
+          <a:solidFill>
+            <a:srgbClr val="D9D9D9"/>
+          </a:solidFill>
+          <a:ln>
+            <a:noFill/>
+          </a:ln>
+          <a:effectLst/>
+        </p:spPr>
+        <p:style>
+          <a:lnRef idx="1">
+            <a:schemeClr val="accent1"/>
+          </a:lnRef>
+          <a:fillRef idx="3">
+            <a:schemeClr val="accent1"/>
+          </a:fillRef>
+          <a:effectRef idx="2">
+            <a:schemeClr val="accent1"/>
+          </a:effectRef>
+          <a:fontRef idx="minor">
+            <a:schemeClr val="lt1"/>
+          </a:fontRef>
+        </p:style>
+        <p:txBody>
+          <a:bodyPr rtlCol="0" anchor="ctr"/>
+          <a:lstStyle/>
+          <a:p>
+            <a:pPr algn="ctr"/>
+          </a:p>
+        </p:txBody>
+      </p:sp>
+      <p:sp>
+        <p:nvSpPr>
           <p:cNvPr id="13" name="TextBox 12"/>
           <p:cNvSpPr txBox="1"/>
           <p:nvPr/>
@@ -3590,7 +3590,7 @@
                 </a:solidFill>
                 <a:latin typeface="Aptos"/>
               </a:rPr>
-              <a:t>Материал для внутреннего обсуждения · v1.0</a:t>
+              <a:t>Версия 1.0 · август 2026</a:t>
             </a:r>
           </a:p>
         </p:txBody>
@@ -3742,7 +3742,7 @@
             <a:avLst/>
           </a:prstGeom>
           <a:solidFill>
-            <a:srgbClr val="1A1A1A"/>
+            <a:srgbClr val="1F3A5F"/>
           </a:solidFill>
           <a:ln>
             <a:noFill/>
@@ -3945,8 +3945,8 @@
         </p:nvSpPr>
         <p:spPr>
           <a:xfrm>
-            <a:off x="3063240" y="1572768"/>
-            <a:ext cx="1097280" cy="237744"/>
+            <a:off x="3063240" y="1536192"/>
+            <a:ext cx="1097280" cy="201168"/>
           </a:xfrm>
           <a:prstGeom prst="rect">
             <a:avLst/>
@@ -3961,7 +3961,7 @@
           <a:p>
             <a:pPr algn="ctr">
               <a:lnSpc>
-                <a:spcPct val="95000"/>
+                <a:spcPct val="90000"/>
               </a:lnSpc>
             </a:pPr>
             <a:r>
@@ -3971,7 +3971,7 @@
                 </a:solidFill>
                 <a:latin typeface="Aptos"/>
               </a:rPr>
-              <a:t>акционерный риск — по процедуре сверху</a:t>
+              <a:t>акционерный риск — по утверждённому порядку</a:t>
             </a:r>
           </a:p>
         </p:txBody>
@@ -3984,8 +3984,8 @@
         </p:nvSpPr>
         <p:spPr>
           <a:xfrm>
-            <a:off x="3063240" y="2039112"/>
-            <a:ext cx="1097280" cy="237744"/>
+            <a:off x="3063240" y="2084831"/>
+            <a:ext cx="1097280" cy="219456"/>
           </a:xfrm>
           <a:prstGeom prst="rect">
             <a:avLst/>
@@ -4315,7 +4315,7 @@
         </p:nvSpPr>
         <p:spPr>
           <a:xfrm>
-            <a:off x="822960" y="2359152"/>
+            <a:off x="822960" y="2889504"/>
             <a:ext cx="3108960" cy="182880"/>
           </a:xfrm>
           <a:prstGeom prst="rect">
@@ -4349,9 +4349,9 @@
           <p:nvPr/>
         </p:nvSpPr>
         <p:spPr>
-          <a:xfrm rot="1123547">
-            <a:off x="5540147" y="2400300"/>
-            <a:ext cx="1424124" cy="228600"/>
+          <a:xfrm rot="5400000">
+            <a:off x="6332220" y="2400300"/>
+            <a:ext cx="320040" cy="228600"/>
           </a:xfrm>
           <a:prstGeom prst="rightArrow">
             <a:avLst/>
@@ -4433,8 +4433,8 @@
         </p:nvSpPr>
         <p:spPr>
           <a:xfrm>
-            <a:off x="640080" y="3977639"/>
-            <a:ext cx="7863840" cy="320040"/>
+            <a:off x="640080" y="3931920"/>
+            <a:ext cx="7863840" cy="365760"/>
           </a:xfrm>
           <a:prstGeom prst="rect">
             <a:avLst/>
@@ -4459,7 +4459,7 @@
                 </a:solidFill>
                 <a:latin typeface="Aptos"/>
               </a:rPr>
-              <a:t>Кредитный риск — ваш, акционерный — наш. Разделение по природе риска, не по успеху.</a:t>
+              <a:t>Кредитный риск — ваш, акционерный — наш. Мезонин и конверсия бриджа — только как совместные продукты с ПФ.</a:t>
             </a:r>
           </a:p>
         </p:txBody>
@@ -5205,7 +5205,7 @@
         <p:spPr>
           <a:xfrm>
             <a:off x="1143000" y="1719072"/>
-            <a:ext cx="6217920" cy="502920"/>
+            <a:ext cx="6217920" cy="457200"/>
           </a:xfrm>
           <a:prstGeom prst="rect">
             <a:avLst/>
@@ -5278,7 +5278,7 @@
         </p:nvSpPr>
         <p:spPr>
           <a:xfrm>
-            <a:off x="640080" y="2304288"/>
+            <a:off x="640080" y="2249424"/>
             <a:ext cx="329184" cy="329184"/>
           </a:xfrm>
           <a:prstGeom prst="rect">
@@ -5322,7 +5322,7 @@
         </p:nvSpPr>
         <p:spPr>
           <a:xfrm>
-            <a:off x="640080" y="2304288"/>
+            <a:off x="640080" y="2249424"/>
             <a:ext cx="329184" cy="329184"/>
           </a:xfrm>
           <a:prstGeom prst="rect">
@@ -5357,8 +5357,8 @@
         </p:nvSpPr>
         <p:spPr>
           <a:xfrm>
-            <a:off x="1143000" y="2286000"/>
-            <a:ext cx="6217920" cy="502920"/>
+            <a:off x="1143000" y="2231136"/>
+            <a:ext cx="6217920" cy="457200"/>
           </a:xfrm>
           <a:prstGeom prst="rect">
             <a:avLst/>
@@ -5396,7 +5396,7 @@
         </p:nvSpPr>
         <p:spPr>
           <a:xfrm>
-            <a:off x="7498079" y="2304288"/>
+            <a:off x="7498079" y="2249424"/>
             <a:ext cx="1005840" cy="329184"/>
           </a:xfrm>
           <a:prstGeom prst="rect">
@@ -5418,7 +5418,7 @@
                 </a:solidFill>
                 <a:latin typeface="Aptos"/>
               </a:rPr>
-              <a:t>октябрь</a:t>
+              <a:t>до 15.10</a:t>
             </a:r>
           </a:p>
         </p:txBody>
@@ -5431,7 +5431,7 @@
         </p:nvSpPr>
         <p:spPr>
           <a:xfrm>
-            <a:off x="640080" y="2871215"/>
+            <a:off x="640080" y="2761488"/>
             <a:ext cx="329184" cy="329184"/>
           </a:xfrm>
           <a:prstGeom prst="rect">
@@ -5475,7 +5475,7 @@
         </p:nvSpPr>
         <p:spPr>
           <a:xfrm>
-            <a:off x="640080" y="2871215"/>
+            <a:off x="640080" y="2761488"/>
             <a:ext cx="329184" cy="329184"/>
           </a:xfrm>
           <a:prstGeom prst="rect">
@@ -5510,8 +5510,8 @@
         </p:nvSpPr>
         <p:spPr>
           <a:xfrm>
-            <a:off x="1143000" y="2852927"/>
-            <a:ext cx="6217920" cy="502920"/>
+            <a:off x="1143000" y="2743200"/>
+            <a:ext cx="6217920" cy="457200"/>
           </a:xfrm>
           <a:prstGeom prst="rect">
             <a:avLst/>
@@ -5549,7 +5549,7 @@
         </p:nvSpPr>
         <p:spPr>
           <a:xfrm>
-            <a:off x="7498079" y="2871215"/>
+            <a:off x="7498079" y="2761488"/>
             <a:ext cx="1005840" cy="329184"/>
           </a:xfrm>
           <a:prstGeom prst="rect">
@@ -5571,7 +5571,7 @@
                 </a:solidFill>
                 <a:latin typeface="Aptos"/>
               </a:rPr>
-              <a:t>октябрь</a:t>
+              <a:t>до 31.10</a:t>
             </a:r>
           </a:p>
         </p:txBody>
@@ -5584,7 +5584,7 @@
         </p:nvSpPr>
         <p:spPr>
           <a:xfrm>
-            <a:off x="640080" y="3438144"/>
+            <a:off x="640080" y="3273552"/>
             <a:ext cx="329184" cy="329184"/>
           </a:xfrm>
           <a:prstGeom prst="rect">
@@ -5628,7 +5628,7 @@
         </p:nvSpPr>
         <p:spPr>
           <a:xfrm>
-            <a:off x="640080" y="3438144"/>
+            <a:off x="640080" y="3273552"/>
             <a:ext cx="329184" cy="329184"/>
           </a:xfrm>
           <a:prstGeom prst="rect">
@@ -5663,8 +5663,8 @@
         </p:nvSpPr>
         <p:spPr>
           <a:xfrm>
-            <a:off x="1143000" y="3419856"/>
-            <a:ext cx="6217920" cy="502920"/>
+            <a:off x="1143000" y="3255264"/>
+            <a:ext cx="6217920" cy="457200"/>
           </a:xfrm>
           <a:prstGeom prst="rect">
             <a:avLst/>
@@ -5702,7 +5702,7 @@
         </p:nvSpPr>
         <p:spPr>
           <a:xfrm>
-            <a:off x="7498079" y="3438144"/>
+            <a:off x="7498079" y="3273552"/>
             <a:ext cx="1005840" cy="329184"/>
           </a:xfrm>
           <a:prstGeom prst="rect">
@@ -5731,7 +5731,46 @@
       </p:sp>
       <p:sp>
         <p:nvSpPr>
-          <p:cNvPr id="22" name="Rectangle 21"/>
+          <p:cNvPr id="22" name="TextBox 21"/>
+          <p:cNvSpPr txBox="1"/>
+          <p:nvPr/>
+        </p:nvSpPr>
+        <p:spPr>
+          <a:xfrm>
+            <a:off x="640080" y="3840480"/>
+            <a:ext cx="7863840" cy="329184"/>
+          </a:xfrm>
+          <a:prstGeom prst="rect">
+            <a:avLst/>
+          </a:prstGeom>
+          <a:noFill/>
+        </p:spPr>
+        <p:txBody>
+          <a:bodyPr wrap="square" lIns="0" rIns="0" tIns="0" bIns="0" anchor="ctr">
+            <a:spAutoFit/>
+          </a:bodyPr>
+          <a:lstStyle/>
+          <a:p>
+            <a:pPr algn="ctr">
+              <a:lnSpc>
+                <a:spcPct val="110000"/>
+              </a:lnSpc>
+            </a:pPr>
+            <a:r>
+              <a:rPr sz="1100" b="0" i="0">
+                <a:solidFill>
+                  <a:srgbClr val="808080"/>
+                </a:solidFill>
+                <a:latin typeface="Aptos"/>
+              </a:rPr>
+              <a:t>При нулевом результате пилота тема закрывается без обязательств и последствий — риск ограничен временем четырёх шагов.</a:t>
+            </a:r>
+          </a:p>
+        </p:txBody>
+      </p:sp>
+      <p:sp>
+        <p:nvSpPr>
+          <p:cNvPr id="23" name="Rectangle 22"/>
           <p:cNvSpPr/>
           <p:nvPr/>
         </p:nvSpPr>
@@ -5775,7 +5814,7 @@
       </p:sp>
       <p:sp>
         <p:nvSpPr>
-          <p:cNvPr id="23" name="TextBox 22"/>
+          <p:cNvPr id="24" name="TextBox 23"/>
           <p:cNvSpPr txBox="1"/>
           <p:nvPr/>
         </p:nvSpPr>
@@ -6064,16 +6103,16 @@
       </p:sp>
       <p:sp>
         <p:nvSpPr>
-          <p:cNvPr id="8" name="Oval 7"/>
+          <p:cNvPr id="8" name="Chevron 7"/>
           <p:cNvSpPr/>
           <p:nvPr/>
         </p:nvSpPr>
         <p:spPr>
           <a:xfrm>
-            <a:off x="3954779" y="2320290"/>
-            <a:ext cx="502920" cy="502920"/>
-          </a:xfrm>
-          <a:prstGeom prst="ellipse">
+            <a:off x="3977639" y="2651760"/>
+            <a:ext cx="457200" cy="365760"/>
+          </a:xfrm>
+          <a:prstGeom prst="chevron">
             <a:avLst/>
           </a:prstGeom>
           <a:solidFill>
@@ -6108,42 +6147,7 @@
       </p:sp>
       <p:sp>
         <p:nvSpPr>
-          <p:cNvPr id="9" name="TextBox 8"/>
-          <p:cNvSpPr txBox="1"/>
-          <p:nvPr/>
-        </p:nvSpPr>
-        <p:spPr>
-          <a:xfrm>
-            <a:off x="3680459" y="2320290"/>
-            <a:ext cx="1051560" cy="502920"/>
-          </a:xfrm>
-          <a:prstGeom prst="rect">
-            <a:avLst/>
-          </a:prstGeom>
-          <a:noFill/>
-        </p:spPr>
-        <p:txBody>
-          <a:bodyPr wrap="square" lIns="0" rIns="0" tIns="0" bIns="0" anchor="ctr">
-            <a:spAutoFit/>
-          </a:bodyPr>
-          <a:lstStyle/>
-          <a:p>
-            <a:pPr algn="ctr"/>
-            <a:r>
-              <a:rPr sz="1800" b="1" i="0">
-                <a:solidFill>
-                  <a:srgbClr val="FFFFFF"/>
-                </a:solidFill>
-                <a:latin typeface="Aptos SemiBold"/>
-              </a:rPr>
-              <a:t>»»</a:t>
-            </a:r>
-          </a:p>
-        </p:txBody>
-      </p:sp>
-      <p:sp>
-        <p:nvSpPr>
-          <p:cNvPr id="10" name="Rectangle 9"/>
+          <p:cNvPr id="9" name="Rectangle 8"/>
           <p:cNvSpPr/>
           <p:nvPr/>
         </p:nvSpPr>
@@ -6187,7 +6191,7 @@
       </p:sp>
       <p:sp>
         <p:nvSpPr>
-          <p:cNvPr id="11" name="Rectangle 10"/>
+          <p:cNvPr id="10" name="Rectangle 9"/>
           <p:cNvSpPr/>
           <p:nvPr/>
         </p:nvSpPr>
@@ -6231,7 +6235,7 @@
       </p:sp>
       <p:sp>
         <p:nvSpPr>
-          <p:cNvPr id="12" name="TextBox 11"/>
+          <p:cNvPr id="11" name="TextBox 10"/>
           <p:cNvSpPr txBox="1"/>
           <p:nvPr/>
         </p:nvSpPr>
@@ -6270,7 +6274,7 @@
       </p:sp>
       <p:sp>
         <p:nvSpPr>
-          <p:cNvPr id="13" name="TextBox 12"/>
+          <p:cNvPr id="12" name="TextBox 11"/>
           <p:cNvSpPr txBox="1"/>
           <p:nvPr/>
         </p:nvSpPr>
@@ -6309,7 +6313,7 @@
       </p:sp>
       <p:sp>
         <p:nvSpPr>
-          <p:cNvPr id="14" name="TextBox 13"/>
+          <p:cNvPr id="13" name="TextBox 12"/>
           <p:cNvSpPr txBox="1"/>
           <p:nvPr/>
         </p:nvSpPr>
@@ -6348,7 +6352,7 @@
       </p:sp>
       <p:sp>
         <p:nvSpPr>
-          <p:cNvPr id="15" name="TextBox 14"/>
+          <p:cNvPr id="14" name="TextBox 13"/>
           <p:cNvSpPr txBox="1"/>
           <p:nvPr/>
         </p:nvSpPr>
@@ -6515,14 +6519,128 @@
       </p:sp>
       <p:sp>
         <p:nvSpPr>
-          <p:cNvPr id="5" name="Rectangle 4"/>
+          <p:cNvPr id="5" name="TextBox 4"/>
+          <p:cNvSpPr txBox="1"/>
+          <p:nvPr/>
+        </p:nvSpPr>
+        <p:spPr>
+          <a:xfrm>
+            <a:off x="640080" y="1508760"/>
+            <a:ext cx="2377440" cy="457200"/>
+          </a:xfrm>
+          <a:prstGeom prst="rect">
+            <a:avLst/>
+          </a:prstGeom>
+          <a:noFill/>
+        </p:spPr>
+        <p:txBody>
+          <a:bodyPr wrap="square" lIns="0" rIns="0" tIns="0" bIns="0" anchor="ctr">
+            <a:spAutoFit/>
+          </a:bodyPr>
+          <a:lstStyle/>
+          <a:p>
+            <a:pPr algn="l"/>
+            <a:r>
+              <a:rPr sz="1050" b="0" i="0">
+                <a:solidFill>
+                  <a:srgbClr val="262626"/>
+                </a:solidFill>
+                <a:latin typeface="Aptos"/>
+              </a:rPr>
+              <a:t>Ключевая ставка ЦБ</a:t>
+            </a:r>
+          </a:p>
+        </p:txBody>
+      </p:sp>
+      <p:sp>
+        <p:nvSpPr>
+          <p:cNvPr id="6" name="TextBox 5"/>
+          <p:cNvSpPr txBox="1"/>
+          <p:nvPr/>
+        </p:nvSpPr>
+        <p:spPr>
+          <a:xfrm>
+            <a:off x="3200400" y="1508760"/>
+            <a:ext cx="4754880" cy="146304"/>
+          </a:xfrm>
+          <a:prstGeom prst="rect">
+            <a:avLst/>
+          </a:prstGeom>
+          <a:noFill/>
+        </p:spPr>
+        <p:txBody>
+          <a:bodyPr wrap="square" lIns="0" rIns="0" tIns="0" bIns="0" anchor="t">
+            <a:spAutoFit/>
+          </a:bodyPr>
+          <a:lstStyle/>
+          <a:p>
+            <a:pPr algn="l"/>
+            <a:r>
+              <a:rPr sz="1000" b="1" i="0">
+                <a:solidFill>
+                  <a:srgbClr val="1A1A1A"/>
+                </a:solidFill>
+                <a:latin typeface="Aptos"/>
+              </a:rPr>
+              <a:t>21% → 14%</a:t>
+            </a:r>
+          </a:p>
+        </p:txBody>
+      </p:sp>
+      <p:sp>
+        <p:nvSpPr>
+          <p:cNvPr id="7" name="Rectangle 6"/>
           <p:cNvSpPr/>
           <p:nvPr/>
         </p:nvSpPr>
         <p:spPr>
           <a:xfrm>
-            <a:off x="640080" y="1426464"/>
-            <a:ext cx="109728" cy="109728"/>
+            <a:off x="3200400" y="1746504"/>
+            <a:ext cx="4754880" cy="146304"/>
+          </a:xfrm>
+          <a:prstGeom prst="rect">
+            <a:avLst/>
+          </a:prstGeom>
+          <a:solidFill>
+            <a:srgbClr val="D9D9D9"/>
+          </a:solidFill>
+          <a:ln>
+            <a:noFill/>
+          </a:ln>
+          <a:effectLst/>
+        </p:spPr>
+        <p:style>
+          <a:lnRef idx="1">
+            <a:schemeClr val="accent1"/>
+          </a:lnRef>
+          <a:fillRef idx="3">
+            <a:schemeClr val="accent1"/>
+          </a:fillRef>
+          <a:effectRef idx="2">
+            <a:schemeClr val="accent1"/>
+          </a:effectRef>
+          <a:fontRef idx="minor">
+            <a:schemeClr val="lt1"/>
+          </a:fontRef>
+        </p:style>
+        <p:txBody>
+          <a:bodyPr rtlCol="0" anchor="ctr"/>
+          <a:lstStyle/>
+          <a:p>
+            <a:pPr algn="ctr"/>
+          </a:p>
+        </p:txBody>
+      </p:sp>
+      <p:sp>
+        <p:nvSpPr>
+          <p:cNvPr id="8" name="Rectangle 7"/>
+          <p:cNvSpPr/>
+          <p:nvPr/>
+        </p:nvSpPr>
+        <p:spPr>
+          <a:xfrm>
+            <a:off x="7153351" y="1691639"/>
+            <a:ext cx="82296" cy="256032"/>
           </a:xfrm>
           <a:prstGeom prst="rect">
             <a:avLst/>
@@ -6559,49 +6677,14 @@
       </p:sp>
       <p:sp>
         <p:nvSpPr>
-          <p:cNvPr id="6" name="TextBox 5"/>
-          <p:cNvSpPr txBox="1"/>
-          <p:nvPr/>
-        </p:nvSpPr>
-        <p:spPr>
-          <a:xfrm>
-            <a:off x="795528" y="1399032"/>
-            <a:ext cx="548640" cy="182880"/>
-          </a:xfrm>
-          <a:prstGeom prst="rect">
-            <a:avLst/>
-          </a:prstGeom>
-          <a:noFill/>
-        </p:spPr>
-        <p:txBody>
-          <a:bodyPr wrap="square" lIns="0" rIns="0" tIns="0" bIns="0" anchor="t">
-            <a:spAutoFit/>
-          </a:bodyPr>
-          <a:lstStyle/>
-          <a:p>
-            <a:pPr algn="l"/>
-            <a:r>
-              <a:rPr sz="1000" b="0" i="0">
-                <a:solidFill>
-                  <a:srgbClr val="808080"/>
-                </a:solidFill>
-                <a:latin typeface="Aptos"/>
-              </a:rPr>
-              <a:t>было</a:t>
-            </a:r>
-          </a:p>
-        </p:txBody>
-      </p:sp>
-      <p:sp>
-        <p:nvSpPr>
-          <p:cNvPr id="7" name="Rectangle 6"/>
+          <p:cNvPr id="9" name="Rectangle 8"/>
           <p:cNvSpPr/>
           <p:nvPr/>
         </p:nvSpPr>
         <p:spPr>
           <a:xfrm>
-            <a:off x="1371600" y="1426464"/>
-            <a:ext cx="109728" cy="109728"/>
+            <a:off x="5821984" y="1691639"/>
+            <a:ext cx="82296" cy="256032"/>
           </a:xfrm>
           <a:prstGeom prst="rect">
             <a:avLst/>
@@ -6638,14 +6721,88 @@
       </p:sp>
       <p:sp>
         <p:nvSpPr>
-          <p:cNvPr id="8" name="TextBox 7"/>
-          <p:cNvSpPr txBox="1"/>
-          <p:nvPr/>
-        </p:nvSpPr>
-        <p:spPr>
-          <a:xfrm>
-            <a:off x="1527048" y="1399032"/>
-            <a:ext cx="548640" cy="182880"/>
+          <p:cNvPr id="10" name="TextBox 9"/>
+          <p:cNvSpPr txBox="1"/>
+          <p:nvPr/>
+        </p:nvSpPr>
+        <p:spPr>
+          <a:xfrm>
+            <a:off x="8001000" y="1508760"/>
+            <a:ext cx="502920" cy="457200"/>
+          </a:xfrm>
+          <a:prstGeom prst="rect">
+            <a:avLst/>
+          </a:prstGeom>
+          <a:noFill/>
+        </p:spPr>
+        <p:txBody>
+          <a:bodyPr wrap="square" lIns="0" rIns="0" tIns="0" bIns="0" anchor="ctr">
+            <a:spAutoFit/>
+          </a:bodyPr>
+          <a:lstStyle/>
+          <a:p>
+            <a:pPr algn="l">
+              <a:lnSpc>
+                <a:spcPct val="100000"/>
+              </a:lnSpc>
+            </a:pPr>
+            <a:r>
+              <a:rPr sz="1000" b="0" i="0">
+                <a:solidFill>
+                  <a:srgbClr val="808080"/>
+                </a:solidFill>
+                <a:latin typeface="Aptos"/>
+              </a:rPr>
+              <a:t>пик пройден</a:t>
+            </a:r>
+          </a:p>
+        </p:txBody>
+      </p:sp>
+      <p:sp>
+        <p:nvSpPr>
+          <p:cNvPr id="11" name="TextBox 10"/>
+          <p:cNvSpPr txBox="1"/>
+          <p:nvPr/>
+        </p:nvSpPr>
+        <p:spPr>
+          <a:xfrm>
+            <a:off x="640080" y="2011680"/>
+            <a:ext cx="2377440" cy="457200"/>
+          </a:xfrm>
+          <a:prstGeom prst="rect">
+            <a:avLst/>
+          </a:prstGeom>
+          <a:noFill/>
+        </p:spPr>
+        <p:txBody>
+          <a:bodyPr wrap="square" lIns="0" rIns="0" tIns="0" bIns="0" anchor="ctr">
+            <a:spAutoFit/>
+          </a:bodyPr>
+          <a:lstStyle/>
+          <a:p>
+            <a:pPr algn="l"/>
+            <a:r>
+              <a:rPr sz="1050" b="0" i="0">
+                <a:solidFill>
+                  <a:srgbClr val="262626"/>
+                </a:solidFill>
+                <a:latin typeface="Aptos"/>
+              </a:rPr>
+              <a:t>Покрытие долга ПФ эскроу</a:t>
+            </a:r>
+          </a:p>
+        </p:txBody>
+      </p:sp>
+      <p:sp>
+        <p:nvSpPr>
+          <p:cNvPr id="12" name="TextBox 11"/>
+          <p:cNvSpPr txBox="1"/>
+          <p:nvPr/>
+        </p:nvSpPr>
+        <p:spPr>
+          <a:xfrm>
+            <a:off x="3200400" y="2011680"/>
+            <a:ext cx="4754880" cy="146304"/>
           </a:xfrm>
           <a:prstGeom prst="rect">
             <a:avLst/>
@@ -6660,61 +6817,26 @@
           <a:p>
             <a:pPr algn="l"/>
             <a:r>
-              <a:rPr sz="1000" b="0" i="0">
-                <a:solidFill>
-                  <a:srgbClr val="808080"/>
+              <a:rPr sz="1000" b="1" i="0">
+                <a:solidFill>
+                  <a:srgbClr val="1A1A1A"/>
                 </a:solidFill>
                 <a:latin typeface="Aptos"/>
               </a:rPr>
-              <a:t>сейчас</a:t>
-            </a:r>
-          </a:p>
-        </p:txBody>
-      </p:sp>
-      <p:sp>
-        <p:nvSpPr>
-          <p:cNvPr id="9" name="TextBox 8"/>
-          <p:cNvSpPr txBox="1"/>
-          <p:nvPr/>
-        </p:nvSpPr>
-        <p:spPr>
-          <a:xfrm>
-            <a:off x="640080" y="1691640"/>
-            <a:ext cx="2377440" cy="457200"/>
-          </a:xfrm>
-          <a:prstGeom prst="rect">
-            <a:avLst/>
-          </a:prstGeom>
-          <a:noFill/>
-        </p:spPr>
-        <p:txBody>
-          <a:bodyPr wrap="square" lIns="0" rIns="0" tIns="0" bIns="0" anchor="ctr">
-            <a:spAutoFit/>
-          </a:bodyPr>
-          <a:lstStyle/>
-          <a:p>
-            <a:pPr algn="l"/>
-            <a:r>
-              <a:rPr sz="1050" b="0" i="0">
-                <a:solidFill>
-                  <a:srgbClr val="262626"/>
-                </a:solidFill>
-                <a:latin typeface="Aptos"/>
-              </a:rPr>
-              <a:t>Ключевая ставка ЦБ</a:t>
-            </a:r>
-          </a:p>
-        </p:txBody>
-      </p:sp>
-      <p:sp>
-        <p:nvSpPr>
-          <p:cNvPr id="10" name="Rectangle 9"/>
+              <a:t>88% → ~70%</a:t>
+            </a:r>
+          </a:p>
+        </p:txBody>
+      </p:sp>
+      <p:sp>
+        <p:nvSpPr>
+          <p:cNvPr id="13" name="Rectangle 12"/>
           <p:cNvSpPr/>
           <p:nvPr/>
         </p:nvSpPr>
         <p:spPr>
           <a:xfrm>
-            <a:off x="3200400" y="1847088"/>
+            <a:off x="3200400" y="2249424"/>
             <a:ext cx="4754880" cy="146304"/>
           </a:xfrm>
           <a:prstGeom prst="rect">
@@ -6752,13 +6874,13 @@
       </p:sp>
       <p:sp>
         <p:nvSpPr>
-          <p:cNvPr id="11" name="Rectangle 10"/>
+          <p:cNvPr id="14" name="Rectangle 13"/>
           <p:cNvSpPr/>
           <p:nvPr/>
         </p:nvSpPr>
         <p:spPr>
           <a:xfrm>
-            <a:off x="7153351" y="1792224"/>
+            <a:off x="7343546" y="2194560"/>
             <a:ext cx="82296" cy="256032"/>
           </a:xfrm>
           <a:prstGeom prst="rect">
@@ -6796,13 +6918,13 @@
       </p:sp>
       <p:sp>
         <p:nvSpPr>
-          <p:cNvPr id="12" name="Rectangle 11"/>
+          <p:cNvPr id="15" name="Rectangle 14"/>
           <p:cNvSpPr/>
           <p:nvPr/>
         </p:nvSpPr>
         <p:spPr>
           <a:xfrm>
-            <a:off x="5821984" y="1792224"/>
+            <a:off x="6487668" y="2194560"/>
             <a:ext cx="82296" cy="256032"/>
           </a:xfrm>
           <a:prstGeom prst="rect">
@@ -6840,48 +6962,13 @@
       </p:sp>
       <p:sp>
         <p:nvSpPr>
-          <p:cNvPr id="13" name="TextBox 12"/>
-          <p:cNvSpPr txBox="1"/>
-          <p:nvPr/>
-        </p:nvSpPr>
-        <p:spPr>
-          <a:xfrm>
-            <a:off x="3200400" y="1673352"/>
-            <a:ext cx="4754880" cy="182880"/>
-          </a:xfrm>
-          <a:prstGeom prst="rect">
-            <a:avLst/>
-          </a:prstGeom>
-          <a:noFill/>
-        </p:spPr>
-        <p:txBody>
-          <a:bodyPr wrap="square" lIns="0" rIns="0" tIns="0" bIns="0" anchor="t">
-            <a:spAutoFit/>
-          </a:bodyPr>
-          <a:lstStyle/>
-          <a:p>
-            <a:pPr algn="l"/>
-            <a:r>
-              <a:rPr sz="1000" b="1" i="0">
-                <a:solidFill>
-                  <a:srgbClr val="1A1A1A"/>
-                </a:solidFill>
-                <a:latin typeface="Aptos"/>
-              </a:rPr>
-              <a:t>21% → 14%</a:t>
-            </a:r>
-          </a:p>
-        </p:txBody>
-      </p:sp>
-      <p:sp>
-        <p:nvSpPr>
-          <p:cNvPr id="14" name="TextBox 13"/>
-          <p:cNvSpPr txBox="1"/>
-          <p:nvPr/>
-        </p:nvSpPr>
-        <p:spPr>
-          <a:xfrm>
-            <a:off x="8001000" y="1691640"/>
+          <p:cNvPr id="16" name="TextBox 15"/>
+          <p:cNvSpPr txBox="1"/>
+          <p:nvPr/>
+        </p:nvSpPr>
+        <p:spPr>
+          <a:xfrm>
+            <a:off x="8001000" y="2011680"/>
             <a:ext cx="502920" cy="457200"/>
           </a:xfrm>
           <a:prstGeom prst="rect">
@@ -6907,20 +6994,20 @@
                 </a:solidFill>
                 <a:latin typeface="Aptos"/>
               </a:rPr>
-              <a:t>пик пройден</a:t>
-            </a:r>
-          </a:p>
-        </p:txBody>
-      </p:sp>
-      <p:sp>
-        <p:nvSpPr>
-          <p:cNvPr id="15" name="TextBox 14"/>
-          <p:cNvSpPr txBox="1"/>
-          <p:nvPr/>
-        </p:nvSpPr>
-        <p:spPr>
-          <a:xfrm>
-            <a:off x="640080" y="2194560"/>
+              <a:t>банки жёстче</a:t>
+            </a:r>
+          </a:p>
+        </p:txBody>
+      </p:sp>
+      <p:sp>
+        <p:nvSpPr>
+          <p:cNvPr id="17" name="TextBox 16"/>
+          <p:cNvSpPr txBox="1"/>
+          <p:nvPr/>
+        </p:nvSpPr>
+        <p:spPr>
+          <a:xfrm>
+            <a:off x="640080" y="2514600"/>
             <a:ext cx="2377440" cy="457200"/>
           </a:xfrm>
           <a:prstGeom prst="rect">
@@ -6942,20 +7029,55 @@
                 </a:solidFill>
                 <a:latin typeface="Aptos"/>
               </a:rPr>
-              <a:t>Покрытие долга ПФ эскроу</a:t>
-            </a:r>
-          </a:p>
-        </p:txBody>
-      </p:sp>
-      <p:sp>
-        <p:nvSpPr>
-          <p:cNvPr id="16" name="Rectangle 15"/>
+              <a:t>Объекты с переносом сроков</a:t>
+            </a:r>
+          </a:p>
+        </p:txBody>
+      </p:sp>
+      <p:sp>
+        <p:nvSpPr>
+          <p:cNvPr id="18" name="TextBox 17"/>
+          <p:cNvSpPr txBox="1"/>
+          <p:nvPr/>
+        </p:nvSpPr>
+        <p:spPr>
+          <a:xfrm>
+            <a:off x="3200400" y="2514600"/>
+            <a:ext cx="4754880" cy="146304"/>
+          </a:xfrm>
+          <a:prstGeom prst="rect">
+            <a:avLst/>
+          </a:prstGeom>
+          <a:noFill/>
+        </p:spPr>
+        <p:txBody>
+          <a:bodyPr wrap="square" lIns="0" rIns="0" tIns="0" bIns="0" anchor="t">
+            <a:spAutoFit/>
+          </a:bodyPr>
+          <a:lstStyle/>
+          <a:p>
+            <a:pPr algn="l"/>
+            <a:r>
+              <a:rPr sz="1000" b="1" i="0">
+                <a:solidFill>
+                  <a:srgbClr val="1A1A1A"/>
+                </a:solidFill>
+                <a:latin typeface="Aptos"/>
+              </a:rPr>
+              <a:t>сейчас: 58%</a:t>
+            </a:r>
+          </a:p>
+        </p:txBody>
+      </p:sp>
+      <p:sp>
+        <p:nvSpPr>
+          <p:cNvPr id="19" name="Rectangle 18"/>
           <p:cNvSpPr/>
           <p:nvPr/>
         </p:nvSpPr>
         <p:spPr>
           <a:xfrm>
-            <a:off x="3200400" y="2350008"/>
+            <a:off x="3200400" y="2752344"/>
             <a:ext cx="4754880" cy="146304"/>
           </a:xfrm>
           <a:prstGeom prst="rect">
@@ -6993,57 +7115,13 @@
       </p:sp>
       <p:sp>
         <p:nvSpPr>
-          <p:cNvPr id="17" name="Rectangle 16"/>
+          <p:cNvPr id="20" name="Rectangle 19"/>
           <p:cNvSpPr/>
           <p:nvPr/>
         </p:nvSpPr>
         <p:spPr>
           <a:xfrm>
-            <a:off x="7343546" y="2295144"/>
-            <a:ext cx="82296" cy="256032"/>
-          </a:xfrm>
-          <a:prstGeom prst="rect">
-            <a:avLst/>
-          </a:prstGeom>
-          <a:solidFill>
-            <a:srgbClr val="808080"/>
-          </a:solidFill>
-          <a:ln>
-            <a:noFill/>
-          </a:ln>
-          <a:effectLst/>
-        </p:spPr>
-        <p:style>
-          <a:lnRef idx="1">
-            <a:schemeClr val="accent1"/>
-          </a:lnRef>
-          <a:fillRef idx="3">
-            <a:schemeClr val="accent1"/>
-          </a:fillRef>
-          <a:effectRef idx="2">
-            <a:schemeClr val="accent1"/>
-          </a:effectRef>
-          <a:fontRef idx="minor">
-            <a:schemeClr val="lt1"/>
-          </a:fontRef>
-        </p:style>
-        <p:txBody>
-          <a:bodyPr rtlCol="0" anchor="ctr"/>
-          <a:lstStyle/>
-          <a:p>
-            <a:pPr algn="ctr"/>
-          </a:p>
-        </p:txBody>
-      </p:sp>
-      <p:sp>
-        <p:nvSpPr>
-          <p:cNvPr id="18" name="Rectangle 17"/>
-          <p:cNvSpPr/>
-          <p:nvPr/>
-        </p:nvSpPr>
-        <p:spPr>
-          <a:xfrm>
-            <a:off x="6487668" y="2295144"/>
+            <a:off x="5917082" y="2697479"/>
             <a:ext cx="82296" cy="256032"/>
           </a:xfrm>
           <a:prstGeom prst="rect">
@@ -7081,48 +7159,13 @@
       </p:sp>
       <p:sp>
         <p:nvSpPr>
-          <p:cNvPr id="19" name="TextBox 18"/>
-          <p:cNvSpPr txBox="1"/>
-          <p:nvPr/>
-        </p:nvSpPr>
-        <p:spPr>
-          <a:xfrm>
-            <a:off x="3200400" y="2176272"/>
-            <a:ext cx="4754880" cy="182880"/>
-          </a:xfrm>
-          <a:prstGeom prst="rect">
-            <a:avLst/>
-          </a:prstGeom>
-          <a:noFill/>
-        </p:spPr>
-        <p:txBody>
-          <a:bodyPr wrap="square" lIns="0" rIns="0" tIns="0" bIns="0" anchor="t">
-            <a:spAutoFit/>
-          </a:bodyPr>
-          <a:lstStyle/>
-          <a:p>
-            <a:pPr algn="l"/>
-            <a:r>
-              <a:rPr sz="1000" b="1" i="0">
-                <a:solidFill>
-                  <a:srgbClr val="1A1A1A"/>
-                </a:solidFill>
-                <a:latin typeface="Aptos"/>
-              </a:rPr>
-              <a:t>88% → ~70%</a:t>
-            </a:r>
-          </a:p>
-        </p:txBody>
-      </p:sp>
-      <p:sp>
-        <p:nvSpPr>
-          <p:cNvPr id="20" name="TextBox 19"/>
-          <p:cNvSpPr txBox="1"/>
-          <p:nvPr/>
-        </p:nvSpPr>
-        <p:spPr>
-          <a:xfrm>
-            <a:off x="8001000" y="2194560"/>
+          <p:cNvPr id="21" name="TextBox 20"/>
+          <p:cNvSpPr txBox="1"/>
+          <p:nvPr/>
+        </p:nvSpPr>
+        <p:spPr>
+          <a:xfrm>
+            <a:off x="8001000" y="2514600"/>
             <a:ext cx="502920" cy="457200"/>
           </a:xfrm>
           <a:prstGeom prst="rect">
@@ -7148,20 +7191,20 @@
                 </a:solidFill>
                 <a:latin typeface="Aptos"/>
               </a:rPr>
-              <a:t>банки жёстче</a:t>
-            </a:r>
-          </a:p>
-        </p:txBody>
-      </p:sp>
-      <p:sp>
-        <p:nvSpPr>
-          <p:cNvPr id="21" name="TextBox 20"/>
-          <p:cNvSpPr txBox="1"/>
-          <p:nvPr/>
-        </p:nvSpPr>
-        <p:spPr>
-          <a:xfrm>
-            <a:off x="640080" y="2697480"/>
+              <a:t>волна реструктуризаций</a:t>
+            </a:r>
+          </a:p>
+        </p:txBody>
+      </p:sp>
+      <p:sp>
+        <p:nvSpPr>
+          <p:cNvPr id="22" name="TextBox 21"/>
+          <p:cNvSpPr txBox="1"/>
+          <p:nvPr/>
+        </p:nvSpPr>
+        <p:spPr>
+          <a:xfrm>
+            <a:off x="640080" y="3017520"/>
             <a:ext cx="2377440" cy="457200"/>
           </a:xfrm>
           <a:prstGeom prst="rect">
@@ -7183,20 +7226,55 @@
                 </a:solidFill>
                 <a:latin typeface="Aptos"/>
               </a:rPr>
-              <a:t>Объекты с переносом сроков</a:t>
-            </a:r>
-          </a:p>
-        </p:txBody>
-      </p:sp>
-      <p:sp>
-        <p:nvSpPr>
-          <p:cNvPr id="22" name="Rectangle 21"/>
+              <a:t>Требование банков к equity</a:t>
+            </a:r>
+          </a:p>
+        </p:txBody>
+      </p:sp>
+      <p:sp>
+        <p:nvSpPr>
+          <p:cNvPr id="23" name="TextBox 22"/>
+          <p:cNvSpPr txBox="1"/>
+          <p:nvPr/>
+        </p:nvSpPr>
+        <p:spPr>
+          <a:xfrm>
+            <a:off x="3200400" y="3017520"/>
+            <a:ext cx="4754880" cy="146304"/>
+          </a:xfrm>
+          <a:prstGeom prst="rect">
+            <a:avLst/>
+          </a:prstGeom>
+          <a:noFill/>
+        </p:spPr>
+        <p:txBody>
+          <a:bodyPr wrap="square" lIns="0" rIns="0" tIns="0" bIns="0" anchor="t">
+            <a:spAutoFit/>
+          </a:bodyPr>
+          <a:lstStyle/>
+          <a:p>
+            <a:pPr algn="l"/>
+            <a:r>
+              <a:rPr sz="1000" b="1" i="0">
+                <a:solidFill>
+                  <a:srgbClr val="1A1A1A"/>
+                </a:solidFill>
+                <a:latin typeface="Aptos"/>
+              </a:rPr>
+              <a:t>сейчас: 15%+</a:t>
+            </a:r>
+          </a:p>
+        </p:txBody>
+      </p:sp>
+      <p:sp>
+        <p:nvSpPr>
+          <p:cNvPr id="24" name="Rectangle 23"/>
           <p:cNvSpPr/>
           <p:nvPr/>
         </p:nvSpPr>
         <p:spPr>
           <a:xfrm>
-            <a:off x="3200400" y="2852928"/>
+            <a:off x="3200400" y="3255263"/>
             <a:ext cx="4754880" cy="146304"/>
           </a:xfrm>
           <a:prstGeom prst="rect">
@@ -7234,13 +7312,13 @@
       </p:sp>
       <p:sp>
         <p:nvSpPr>
-          <p:cNvPr id="23" name="Rectangle 22"/>
+          <p:cNvPr id="25" name="Rectangle 24"/>
           <p:cNvSpPr/>
           <p:nvPr/>
         </p:nvSpPr>
         <p:spPr>
           <a:xfrm>
-            <a:off x="5917082" y="2798064"/>
+            <a:off x="6012180" y="3200399"/>
             <a:ext cx="82296" cy="256032"/>
           </a:xfrm>
           <a:prstGeom prst="rect">
@@ -7278,48 +7356,13 @@
       </p:sp>
       <p:sp>
         <p:nvSpPr>
-          <p:cNvPr id="24" name="TextBox 23"/>
-          <p:cNvSpPr txBox="1"/>
-          <p:nvPr/>
-        </p:nvSpPr>
-        <p:spPr>
-          <a:xfrm>
-            <a:off x="3200400" y="2679192"/>
-            <a:ext cx="4754880" cy="182880"/>
-          </a:xfrm>
-          <a:prstGeom prst="rect">
-            <a:avLst/>
-          </a:prstGeom>
-          <a:noFill/>
-        </p:spPr>
-        <p:txBody>
-          <a:bodyPr wrap="square" lIns="0" rIns="0" tIns="0" bIns="0" anchor="t">
-            <a:spAutoFit/>
-          </a:bodyPr>
-          <a:lstStyle/>
-          <a:p>
-            <a:pPr algn="l"/>
-            <a:r>
-              <a:rPr sz="1000" b="1" i="0">
-                <a:solidFill>
-                  <a:srgbClr val="1A1A1A"/>
-                </a:solidFill>
-                <a:latin typeface="Aptos"/>
-              </a:rPr>
-              <a:t>58%</a:t>
-            </a:r>
-          </a:p>
-        </p:txBody>
-      </p:sp>
-      <p:sp>
-        <p:nvSpPr>
-          <p:cNvPr id="25" name="TextBox 24"/>
-          <p:cNvSpPr txBox="1"/>
-          <p:nvPr/>
-        </p:nvSpPr>
-        <p:spPr>
-          <a:xfrm>
-            <a:off x="8001000" y="2697480"/>
+          <p:cNvPr id="26" name="TextBox 25"/>
+          <p:cNvSpPr txBox="1"/>
+          <p:nvPr/>
+        </p:nvSpPr>
+        <p:spPr>
+          <a:xfrm>
+            <a:off x="8001000" y="3017520"/>
             <a:ext cx="502920" cy="457200"/>
           </a:xfrm>
           <a:prstGeom prst="rect">
@@ -7345,42 +7388,7 @@
                 </a:solidFill>
                 <a:latin typeface="Aptos"/>
               </a:rPr>
-              <a:t>волна реструктуризаций</a:t>
-            </a:r>
-          </a:p>
-        </p:txBody>
-      </p:sp>
-      <p:sp>
-        <p:nvSpPr>
-          <p:cNvPr id="26" name="TextBox 25"/>
-          <p:cNvSpPr txBox="1"/>
-          <p:nvPr/>
-        </p:nvSpPr>
-        <p:spPr>
-          <a:xfrm>
-            <a:off x="640080" y="3200400"/>
-            <a:ext cx="2377440" cy="457200"/>
-          </a:xfrm>
-          <a:prstGeom prst="rect">
-            <a:avLst/>
-          </a:prstGeom>
-          <a:noFill/>
-        </p:spPr>
-        <p:txBody>
-          <a:bodyPr wrap="square" lIns="0" rIns="0" tIns="0" bIns="0" anchor="ctr">
-            <a:spAutoFit/>
-          </a:bodyPr>
-          <a:lstStyle/>
-          <a:p>
-            <a:pPr algn="l"/>
-            <a:r>
-              <a:rPr sz="1050" b="0" i="0">
-                <a:solidFill>
-                  <a:srgbClr val="262626"/>
-                </a:solidFill>
-                <a:latin typeface="Aptos"/>
-              </a:rPr>
-              <a:t>Требование банков к equity</a:t>
+              <a:t>нужен партнёр</a:t>
             </a:r>
           </a:p>
         </p:txBody>
@@ -7393,14 +7401,14 @@
         </p:nvSpPr>
         <p:spPr>
           <a:xfrm>
-            <a:off x="3200400" y="3355848"/>
-            <a:ext cx="4754880" cy="146304"/>
+            <a:off x="640080" y="3730752"/>
+            <a:ext cx="7863840" cy="566928"/>
           </a:xfrm>
           <a:prstGeom prst="rect">
             <a:avLst/>
           </a:prstGeom>
           <a:solidFill>
-            <a:srgbClr val="D9D9D9"/>
+            <a:srgbClr val="F5F5F5"/>
           </a:solidFill>
           <a:ln>
             <a:noFill/>
@@ -7437,8 +7445,8 @@
         </p:nvSpPr>
         <p:spPr>
           <a:xfrm>
-            <a:off x="6012180" y="3300984"/>
-            <a:ext cx="82296" cy="256032"/>
+            <a:off x="640080" y="3730752"/>
+            <a:ext cx="54864" cy="566928"/>
           </a:xfrm>
           <a:prstGeom prst="rect">
             <a:avLst/>
@@ -7481,168 +7489,6 @@
         </p:nvSpPr>
         <p:spPr>
           <a:xfrm>
-            <a:off x="3200400" y="3182112"/>
-            <a:ext cx="4754880" cy="182880"/>
-          </a:xfrm>
-          <a:prstGeom prst="rect">
-            <a:avLst/>
-          </a:prstGeom>
-          <a:noFill/>
-        </p:spPr>
-        <p:txBody>
-          <a:bodyPr wrap="square" lIns="0" rIns="0" tIns="0" bIns="0" anchor="t">
-            <a:spAutoFit/>
-          </a:bodyPr>
-          <a:lstStyle/>
-          <a:p>
-            <a:pPr algn="l"/>
-            <a:r>
-              <a:rPr sz="1000" b="1" i="0">
-                <a:solidFill>
-                  <a:srgbClr val="1A1A1A"/>
-                </a:solidFill>
-                <a:latin typeface="Aptos"/>
-              </a:rPr>
-              <a:t>15%+</a:t>
-            </a:r>
-          </a:p>
-        </p:txBody>
-      </p:sp>
-      <p:sp>
-        <p:nvSpPr>
-          <p:cNvPr id="30" name="TextBox 29"/>
-          <p:cNvSpPr txBox="1"/>
-          <p:nvPr/>
-        </p:nvSpPr>
-        <p:spPr>
-          <a:xfrm>
-            <a:off x="8001000" y="3200400"/>
-            <a:ext cx="502920" cy="457200"/>
-          </a:xfrm>
-          <a:prstGeom prst="rect">
-            <a:avLst/>
-          </a:prstGeom>
-          <a:noFill/>
-        </p:spPr>
-        <p:txBody>
-          <a:bodyPr wrap="square" lIns="0" rIns="0" tIns="0" bIns="0" anchor="ctr">
-            <a:spAutoFit/>
-          </a:bodyPr>
-          <a:lstStyle/>
-          <a:p>
-            <a:pPr algn="l">
-              <a:lnSpc>
-                <a:spcPct val="100000"/>
-              </a:lnSpc>
-            </a:pPr>
-            <a:r>
-              <a:rPr sz="1000" b="0" i="0">
-                <a:solidFill>
-                  <a:srgbClr val="808080"/>
-                </a:solidFill>
-                <a:latin typeface="Aptos"/>
-              </a:rPr>
-              <a:t>нужен партнёр</a:t>
-            </a:r>
-          </a:p>
-        </p:txBody>
-      </p:sp>
-      <p:sp>
-        <p:nvSpPr>
-          <p:cNvPr id="31" name="Rectangle 30"/>
-          <p:cNvSpPr/>
-          <p:nvPr/>
-        </p:nvSpPr>
-        <p:spPr>
-          <a:xfrm>
-            <a:off x="640080" y="3730752"/>
-            <a:ext cx="7863840" cy="566928"/>
-          </a:xfrm>
-          <a:prstGeom prst="rect">
-            <a:avLst/>
-          </a:prstGeom>
-          <a:solidFill>
-            <a:srgbClr val="F5F5F5"/>
-          </a:solidFill>
-          <a:ln>
-            <a:noFill/>
-          </a:ln>
-          <a:effectLst/>
-        </p:spPr>
-        <p:style>
-          <a:lnRef idx="1">
-            <a:schemeClr val="accent1"/>
-          </a:lnRef>
-          <a:fillRef idx="3">
-            <a:schemeClr val="accent1"/>
-          </a:fillRef>
-          <a:effectRef idx="2">
-            <a:schemeClr val="accent1"/>
-          </a:effectRef>
-          <a:fontRef idx="minor">
-            <a:schemeClr val="lt1"/>
-          </a:fontRef>
-        </p:style>
-        <p:txBody>
-          <a:bodyPr rtlCol="0" anchor="ctr"/>
-          <a:lstStyle/>
-          <a:p>
-            <a:pPr algn="ctr"/>
-          </a:p>
-        </p:txBody>
-      </p:sp>
-      <p:sp>
-        <p:nvSpPr>
-          <p:cNvPr id="32" name="Rectangle 31"/>
-          <p:cNvSpPr/>
-          <p:nvPr/>
-        </p:nvSpPr>
-        <p:spPr>
-          <a:xfrm>
-            <a:off x="640080" y="3730752"/>
-            <a:ext cx="54864" cy="566928"/>
-          </a:xfrm>
-          <a:prstGeom prst="rect">
-            <a:avLst/>
-          </a:prstGeom>
-          <a:solidFill>
-            <a:srgbClr val="1F3A5F"/>
-          </a:solidFill>
-          <a:ln>
-            <a:noFill/>
-          </a:ln>
-          <a:effectLst/>
-        </p:spPr>
-        <p:style>
-          <a:lnRef idx="1">
-            <a:schemeClr val="accent1"/>
-          </a:lnRef>
-          <a:fillRef idx="3">
-            <a:schemeClr val="accent1"/>
-          </a:fillRef>
-          <a:effectRef idx="2">
-            <a:schemeClr val="accent1"/>
-          </a:effectRef>
-          <a:fontRef idx="minor">
-            <a:schemeClr val="lt1"/>
-          </a:fontRef>
-        </p:style>
-        <p:txBody>
-          <a:bodyPr rtlCol="0" anchor="ctr"/>
-          <a:lstStyle/>
-          <a:p>
-            <a:pPr algn="ctr"/>
-          </a:p>
-        </p:txBody>
-      </p:sp>
-      <p:sp>
-        <p:nvSpPr>
-          <p:cNvPr id="33" name="TextBox 32"/>
-          <p:cNvSpPr txBox="1"/>
-          <p:nvPr/>
-        </p:nvSpPr>
-        <p:spPr>
-          <a:xfrm>
             <a:off x="868680" y="3730752"/>
             <a:ext cx="7498079" cy="566928"/>
           </a:xfrm>
@@ -7685,7 +7531,7 @@
       </p:sp>
       <p:sp>
         <p:nvSpPr>
-          <p:cNvPr id="34" name="TextBox 33"/>
+          <p:cNvPr id="30" name="TextBox 29"/>
           <p:cNvSpPr txBox="1"/>
           <p:nvPr/>
         </p:nvSpPr>
@@ -7720,7 +7566,7 @@
       </p:sp>
       <p:sp>
         <p:nvSpPr>
-          <p:cNvPr id="35" name="TextBox 34"/>
+          <p:cNvPr id="31" name="TextBox 30"/>
           <p:cNvSpPr txBox="1"/>
           <p:nvPr/>
         </p:nvSpPr>
@@ -7893,7 +7739,7 @@
         </p:nvSpPr>
         <p:spPr>
           <a:xfrm>
-            <a:off x="640080" y="3566160"/>
+            <a:off x="640080" y="3474720"/>
             <a:ext cx="4023360" cy="18288"/>
           </a:xfrm>
           <a:prstGeom prst="rect">
@@ -7937,7 +7783,7 @@
         </p:nvSpPr>
         <p:spPr>
           <a:xfrm>
-            <a:off x="914400" y="2926080"/>
+            <a:off x="914400" y="2834639"/>
             <a:ext cx="1188720" cy="640080"/>
           </a:xfrm>
           <a:prstGeom prst="rect">
@@ -7981,7 +7827,7 @@
         </p:nvSpPr>
         <p:spPr>
           <a:xfrm>
-            <a:off x="914400" y="2926080"/>
+            <a:off x="914400" y="2834639"/>
             <a:ext cx="1188720" cy="640080"/>
           </a:xfrm>
           <a:prstGeom prst="rect">
@@ -8016,7 +7862,7 @@
         </p:nvSpPr>
         <p:spPr>
           <a:xfrm>
-            <a:off x="2651760" y="2286000"/>
+            <a:off x="2651760" y="2194560"/>
             <a:ext cx="1188720" cy="1280160"/>
           </a:xfrm>
           <a:prstGeom prst="rect">
@@ -8060,7 +7906,7 @@
         </p:nvSpPr>
         <p:spPr>
           <a:xfrm>
-            <a:off x="2651760" y="1645920"/>
+            <a:off x="2651760" y="1554480"/>
             <a:ext cx="1188720" cy="640080"/>
           </a:xfrm>
           <a:prstGeom prst="rect">
@@ -8104,7 +7950,7 @@
         </p:nvSpPr>
         <p:spPr>
           <a:xfrm>
-            <a:off x="2651760" y="2423160"/>
+            <a:off x="2651760" y="2331720"/>
             <a:ext cx="1188720" cy="640080"/>
           </a:xfrm>
           <a:prstGeom prst="rect">
@@ -8139,7 +7985,7 @@
         </p:nvSpPr>
         <p:spPr>
           <a:xfrm>
-            <a:off x="731519" y="3593591"/>
+            <a:off x="731519" y="3502151"/>
             <a:ext cx="1554480" cy="219456"/>
           </a:xfrm>
           <a:prstGeom prst="rect">
@@ -8174,7 +8020,7 @@
         </p:nvSpPr>
         <p:spPr>
           <a:xfrm>
-            <a:off x="2468879" y="3593591"/>
+            <a:off x="2468879" y="3502151"/>
             <a:ext cx="1554480" cy="219456"/>
           </a:xfrm>
           <a:prstGeom prst="rect">
@@ -8209,7 +8055,7 @@
         </p:nvSpPr>
         <p:spPr>
           <a:xfrm>
-            <a:off x="5029200" y="1463040"/>
+            <a:off x="5029200" y="1371600"/>
             <a:ext cx="3291840" cy="1143000"/>
           </a:xfrm>
           <a:prstGeom prst="rect">
@@ -8253,7 +8099,7 @@
         </p:nvSpPr>
         <p:spPr>
           <a:xfrm>
-            <a:off x="5029200" y="1463040"/>
+            <a:off x="5029200" y="1371600"/>
             <a:ext cx="3291840" cy="54864"/>
           </a:xfrm>
           <a:prstGeom prst="rect">
@@ -8297,7 +8143,7 @@
         </p:nvSpPr>
         <p:spPr>
           <a:xfrm>
-            <a:off x="5193792" y="1572768"/>
+            <a:off x="5193792" y="1481328"/>
             <a:ext cx="2962656" cy="502920"/>
           </a:xfrm>
           <a:prstGeom prst="rect">
@@ -8332,7 +8178,7 @@
         </p:nvSpPr>
         <p:spPr>
           <a:xfrm>
-            <a:off x="5193792" y="2084831"/>
+            <a:off x="5193792" y="1993392"/>
             <a:ext cx="2962656" cy="457200"/>
           </a:xfrm>
           <a:prstGeom prst="rect">
@@ -8371,7 +8217,7 @@
         </p:nvSpPr>
         <p:spPr>
           <a:xfrm>
-            <a:off x="5029200" y="2697480"/>
+            <a:off x="5029200" y="2606040"/>
             <a:ext cx="3291840" cy="1143000"/>
           </a:xfrm>
           <a:prstGeom prst="rect">
@@ -8415,7 +8261,7 @@
         </p:nvSpPr>
         <p:spPr>
           <a:xfrm>
-            <a:off x="5029200" y="2697480"/>
+            <a:off x="5029200" y="2606040"/>
             <a:ext cx="3291840" cy="54864"/>
           </a:xfrm>
           <a:prstGeom prst="rect">
@@ -8459,7 +8305,7 @@
         </p:nvSpPr>
         <p:spPr>
           <a:xfrm>
-            <a:off x="5193792" y="2807208"/>
+            <a:off x="5193792" y="2715768"/>
             <a:ext cx="2962656" cy="502920"/>
           </a:xfrm>
           <a:prstGeom prst="rect">
@@ -8494,7 +8340,7 @@
         </p:nvSpPr>
         <p:spPr>
           <a:xfrm>
-            <a:off x="5193792" y="3319272"/>
+            <a:off x="5193792" y="3227832"/>
             <a:ext cx="2962656" cy="457200"/>
           </a:xfrm>
           <a:prstGeom prst="rect">
@@ -8533,8 +8379,8 @@
         </p:nvSpPr>
         <p:spPr>
           <a:xfrm>
-            <a:off x="640080" y="3858768"/>
-            <a:ext cx="7863840" cy="438912"/>
+            <a:off x="640080" y="3749039"/>
+            <a:ext cx="7863840" cy="548640"/>
           </a:xfrm>
           <a:prstGeom prst="rect">
             <a:avLst/>
@@ -8577,8 +8423,8 @@
         </p:nvSpPr>
         <p:spPr>
           <a:xfrm>
-            <a:off x="640080" y="3858768"/>
-            <a:ext cx="54864" cy="438912"/>
+            <a:off x="640080" y="3749039"/>
+            <a:ext cx="54864" cy="548640"/>
           </a:xfrm>
           <a:prstGeom prst="rect">
             <a:avLst/>
@@ -8621,8 +8467,8 @@
         </p:nvSpPr>
         <p:spPr>
           <a:xfrm>
-            <a:off x="868680" y="3858768"/>
-            <a:ext cx="7498079" cy="438912"/>
+            <a:off x="868680" y="3749039"/>
+            <a:ext cx="7498079" cy="548640"/>
           </a:xfrm>
           <a:prstGeom prst="rect">
             <a:avLst/>
@@ -8656,7 +8502,7 @@
                 </a:solidFill>
                 <a:latin typeface="Aptos"/>
               </a:rPr>
-              <a:t>Кто-то должен принять на себя убыток за чрезмерный оптимизм прошлых лет. Кто и в какой форме?</a:t>
+              <a:t>Кто-то должен принять на себя убыток за чрезмерный оптимизм прошлых лет. Кто и в какой форме? Оценка 2–3× — гипотеза; пилотная экспертиза её проверит.</a:t>
             </a:r>
           </a:p>
         </p:txBody>
@@ -9436,14 +9282,14 @@
         </p:nvSpPr>
         <p:spPr>
           <a:xfrm>
-            <a:off x="3703320" y="2240280"/>
-            <a:ext cx="1737360" cy="640080"/>
+            <a:off x="3566160" y="2194560"/>
+            <a:ext cx="2011680" cy="731520"/>
           </a:xfrm>
           <a:prstGeom prst="rect">
             <a:avLst/>
           </a:prstGeom>
           <a:solidFill>
-            <a:srgbClr val="1A1A1A"/>
+            <a:srgbClr val="1F3A5F"/>
           </a:solidFill>
           <a:ln>
             <a:noFill/>
@@ -9480,8 +9326,8 @@
         </p:nvSpPr>
         <p:spPr>
           <a:xfrm>
-            <a:off x="3794759" y="2350008"/>
-            <a:ext cx="1554480" cy="274320"/>
+            <a:off x="3657600" y="2331720"/>
+            <a:ext cx="1828800" cy="228600"/>
           </a:xfrm>
           <a:prstGeom prst="rect">
             <a:avLst/>
@@ -9496,7 +9342,7 @@
           <a:p>
             <a:pPr algn="ctr"/>
             <a:r>
-              <a:rPr sz="1100" b="1" i="0" spc="100">
+              <a:rPr sz="1050" b="1" i="0" spc="100">
                 <a:solidFill>
                   <a:srgbClr val="FFFFFF"/>
                 </a:solidFill>
@@ -9515,8 +9361,8 @@
         </p:nvSpPr>
         <p:spPr>
           <a:xfrm>
-            <a:off x="3794759" y="2606040"/>
-            <a:ext cx="1554480" cy="228600"/>
+            <a:off x="3657600" y="2615184"/>
+            <a:ext cx="1828800" cy="228600"/>
           </a:xfrm>
           <a:prstGeom prst="rect">
             <a:avLst/>
@@ -9550,8 +9396,8 @@
         </p:nvSpPr>
         <p:spPr>
           <a:xfrm rot="8100000">
-            <a:off x="5486400" y="2651760"/>
-            <a:ext cx="914400" cy="228600"/>
+            <a:off x="5623560" y="2651760"/>
+            <a:ext cx="777240" cy="228600"/>
           </a:xfrm>
           <a:prstGeom prst="rightArrow">
             <a:avLst/>
@@ -9594,8 +9440,8 @@
         </p:nvSpPr>
         <p:spPr>
           <a:xfrm>
-            <a:off x="5806440" y="2395728"/>
-            <a:ext cx="1463040" cy="182880"/>
+            <a:off x="6419088" y="2606040"/>
+            <a:ext cx="1280160" cy="274320"/>
           </a:xfrm>
           <a:prstGeom prst="rect">
             <a:avLst/>
@@ -9673,8 +9519,8 @@
         </p:nvSpPr>
         <p:spPr>
           <a:xfrm>
-            <a:off x="1417320" y="2761488"/>
-            <a:ext cx="1371600" cy="182880"/>
+            <a:off x="1188720" y="2743200"/>
+            <a:ext cx="1417320" cy="219456"/>
           </a:xfrm>
           <a:prstGeom prst="rect">
             <a:avLst/>
@@ -10385,7 +10231,7 @@
             <a:avLst/>
           </a:prstGeom>
           <a:solidFill>
-            <a:srgbClr val="C77B30"/>
+            <a:srgbClr val="1F3A5F"/>
           </a:solidFill>
           <a:ln>
             <a:noFill/>
@@ -10440,7 +10286,7 @@
             <a:r>
               <a:rPr sz="3000" b="1" i="0">
                 <a:solidFill>
-                  <a:srgbClr val="C77B30"/>
+                  <a:srgbClr val="1F3A5F"/>
                 </a:solidFill>
                 <a:latin typeface="Aptos Display"/>
               </a:rPr>
@@ -12829,8 +12675,8 @@
         </p:nvSpPr>
         <p:spPr>
           <a:xfrm>
-            <a:off x="640080" y="1417320"/>
-            <a:ext cx="7863840" cy="228600"/>
+            <a:off x="640080" y="1408176"/>
+            <a:ext cx="7863840" cy="182880"/>
           </a:xfrm>
           <a:prstGeom prst="rect">
             <a:avLst/>
@@ -12858,14 +12704,119 @@
       </p:sp>
       <p:sp>
         <p:nvSpPr>
-          <p:cNvPr id="6" name="Rectangle 5"/>
+          <p:cNvPr id="6" name="TextBox 5"/>
+          <p:cNvSpPr txBox="1"/>
+          <p:nvPr/>
+        </p:nvSpPr>
+        <p:spPr>
+          <a:xfrm>
+            <a:off x="640080" y="1645920"/>
+            <a:ext cx="4718303" cy="146304"/>
+          </a:xfrm>
+          <a:prstGeom prst="rect">
+            <a:avLst/>
+          </a:prstGeom>
+          <a:noFill/>
+        </p:spPr>
+        <p:txBody>
+          <a:bodyPr wrap="square" lIns="0" rIns="0" tIns="0" bIns="0" anchor="t">
+            <a:spAutoFit/>
+          </a:bodyPr>
+          <a:lstStyle/>
+          <a:p>
+            <a:pPr algn="ctr"/>
+            <a:r>
+              <a:rPr sz="1000" b="0" i="0">
+                <a:solidFill>
+                  <a:srgbClr val="808080"/>
+                </a:solidFill>
+                <a:latin typeface="Aptos"/>
+              </a:rPr>
+              <a:t>не проходит</a:t>
+            </a:r>
+          </a:p>
+        </p:txBody>
+      </p:sp>
+      <p:sp>
+        <p:nvSpPr>
+          <p:cNvPr id="7" name="TextBox 6"/>
+          <p:cNvSpPr txBox="1"/>
+          <p:nvPr/>
+        </p:nvSpPr>
+        <p:spPr>
+          <a:xfrm>
+            <a:off x="5358383" y="1645920"/>
+            <a:ext cx="1572768" cy="146304"/>
+          </a:xfrm>
+          <a:prstGeom prst="rect">
+            <a:avLst/>
+          </a:prstGeom>
+          <a:noFill/>
+        </p:spPr>
+        <p:txBody>
+          <a:bodyPr wrap="square" lIns="0" rIns="0" tIns="0" bIns="0" anchor="t">
+            <a:spAutoFit/>
+          </a:bodyPr>
+          <a:lstStyle/>
+          <a:p>
+            <a:pPr algn="ctr"/>
+            <a:r>
+              <a:rPr sz="1000" b="0" i="0">
+                <a:solidFill>
+                  <a:srgbClr val="808080"/>
+                </a:solidFill>
+                <a:latin typeface="Aptos"/>
+              </a:rPr>
+              <a:t>зона нормы</a:t>
+            </a:r>
+          </a:p>
+        </p:txBody>
+      </p:sp>
+      <p:sp>
+        <p:nvSpPr>
+          <p:cNvPr id="8" name="TextBox 7"/>
+          <p:cNvSpPr txBox="1"/>
+          <p:nvPr/>
+        </p:nvSpPr>
+        <p:spPr>
+          <a:xfrm>
+            <a:off x="6931151" y="1645920"/>
+            <a:ext cx="1572768" cy="146304"/>
+          </a:xfrm>
+          <a:prstGeom prst="rect">
+            <a:avLst/>
+          </a:prstGeom>
+          <a:noFill/>
+        </p:spPr>
+        <p:txBody>
+          <a:bodyPr wrap="square" lIns="0" rIns="0" tIns="0" bIns="0" anchor="t">
+            <a:spAutoFit/>
+          </a:bodyPr>
+          <a:lstStyle/>
+          <a:p>
+            <a:pPr algn="ctr"/>
+            <a:r>
+              <a:rPr sz="1000" b="0" i="0">
+                <a:solidFill>
+                  <a:srgbClr val="808080"/>
+                </a:solidFill>
+                <a:latin typeface="Aptos"/>
+              </a:rPr>
+              <a:t>комфорт</a:t>
+            </a:r>
+          </a:p>
+        </p:txBody>
+      </p:sp>
+      <p:sp>
+        <p:nvSpPr>
+          <p:cNvPr id="9" name="Rectangle 8"/>
           <p:cNvSpPr/>
           <p:nvPr/>
         </p:nvSpPr>
         <p:spPr>
           <a:xfrm>
-            <a:off x="640080" y="1691640"/>
-            <a:ext cx="4718303" cy="310896"/>
+            <a:off x="640080" y="1847088"/>
+            <a:ext cx="4718303" cy="274320"/>
           </a:xfrm>
           <a:prstGeom prst="rect">
             <a:avLst/>
@@ -12902,14 +12853,14 @@
       </p:sp>
       <p:sp>
         <p:nvSpPr>
-          <p:cNvPr id="7" name="Rectangle 6"/>
+          <p:cNvPr id="10" name="Rectangle 9"/>
           <p:cNvSpPr/>
           <p:nvPr/>
         </p:nvSpPr>
         <p:spPr>
           <a:xfrm>
-            <a:off x="5358383" y="1691640"/>
-            <a:ext cx="1572768" cy="310896"/>
+            <a:off x="5358383" y="1847088"/>
+            <a:ext cx="1572768" cy="274320"/>
           </a:xfrm>
           <a:prstGeom prst="rect">
             <a:avLst/>
@@ -12946,14 +12897,14 @@
       </p:sp>
       <p:sp>
         <p:nvSpPr>
-          <p:cNvPr id="8" name="Rectangle 7"/>
+          <p:cNvPr id="11" name="Rectangle 10"/>
           <p:cNvSpPr/>
           <p:nvPr/>
         </p:nvSpPr>
         <p:spPr>
           <a:xfrm>
-            <a:off x="6931151" y="1691640"/>
-            <a:ext cx="1572768" cy="310896"/>
+            <a:off x="6931151" y="1847088"/>
+            <a:ext cx="1572768" cy="274320"/>
           </a:xfrm>
           <a:prstGeom prst="rect">
             <a:avLst/>
@@ -12990,118 +12941,13 @@
       </p:sp>
       <p:sp>
         <p:nvSpPr>
-          <p:cNvPr id="9" name="TextBox 8"/>
-          <p:cNvSpPr txBox="1"/>
-          <p:nvPr/>
-        </p:nvSpPr>
-        <p:spPr>
-          <a:xfrm>
-            <a:off x="640080" y="1691640"/>
-            <a:ext cx="4718303" cy="310896"/>
-          </a:xfrm>
-          <a:prstGeom prst="rect">
-            <a:avLst/>
-          </a:prstGeom>
-          <a:noFill/>
-        </p:spPr>
-        <p:txBody>
-          <a:bodyPr wrap="square" lIns="0" rIns="0" tIns="0" bIns="0" anchor="ctr">
-            <a:spAutoFit/>
-          </a:bodyPr>
-          <a:lstStyle/>
-          <a:p>
-            <a:pPr algn="ctr"/>
-            <a:r>
-              <a:rPr sz="1000" b="0" i="0">
-                <a:solidFill>
-                  <a:srgbClr val="262626"/>
-                </a:solidFill>
-                <a:latin typeface="Aptos"/>
-              </a:rPr>
-              <a:t>не проходит</a:t>
-            </a:r>
-          </a:p>
-        </p:txBody>
-      </p:sp>
-      <p:sp>
-        <p:nvSpPr>
-          <p:cNvPr id="10" name="TextBox 9"/>
-          <p:cNvSpPr txBox="1"/>
-          <p:nvPr/>
-        </p:nvSpPr>
-        <p:spPr>
-          <a:xfrm>
-            <a:off x="5358383" y="1691640"/>
-            <a:ext cx="1572768" cy="310896"/>
-          </a:xfrm>
-          <a:prstGeom prst="rect">
-            <a:avLst/>
-          </a:prstGeom>
-          <a:noFill/>
-        </p:spPr>
-        <p:txBody>
-          <a:bodyPr wrap="square" lIns="0" rIns="0" tIns="0" bIns="0" anchor="ctr">
-            <a:spAutoFit/>
-          </a:bodyPr>
-          <a:lstStyle/>
-          <a:p>
-            <a:pPr algn="ctr"/>
-            <a:r>
-              <a:rPr sz="1000" b="0" i="0">
-                <a:solidFill>
-                  <a:srgbClr val="1A1A1A"/>
-                </a:solidFill>
-                <a:latin typeface="Aptos"/>
-              </a:rPr>
-              <a:t>зона нормы</a:t>
-            </a:r>
-          </a:p>
-        </p:txBody>
-      </p:sp>
-      <p:sp>
-        <p:nvSpPr>
-          <p:cNvPr id="11" name="TextBox 10"/>
-          <p:cNvSpPr txBox="1"/>
-          <p:nvPr/>
-        </p:nvSpPr>
-        <p:spPr>
-          <a:xfrm>
-            <a:off x="6931151" y="1691640"/>
-            <a:ext cx="1572768" cy="310896"/>
-          </a:xfrm>
-          <a:prstGeom prst="rect">
-            <a:avLst/>
-          </a:prstGeom>
-          <a:noFill/>
-        </p:spPr>
-        <p:txBody>
-          <a:bodyPr wrap="square" lIns="0" rIns="0" tIns="0" bIns="0" anchor="ctr">
-            <a:spAutoFit/>
-          </a:bodyPr>
-          <a:lstStyle/>
-          <a:p>
-            <a:pPr algn="ctr"/>
-            <a:r>
-              <a:rPr sz="1000" b="0" i="0">
-                <a:solidFill>
-                  <a:srgbClr val="FFFFFF"/>
-                </a:solidFill>
-                <a:latin typeface="Aptos"/>
-              </a:rPr>
-              <a:t>комфорт</a:t>
-            </a:r>
-          </a:p>
-        </p:txBody>
-      </p:sp>
-      <p:sp>
-        <p:nvSpPr>
           <p:cNvPr id="12" name="Rectangle 11"/>
           <p:cNvSpPr/>
           <p:nvPr/>
         </p:nvSpPr>
         <p:spPr>
           <a:xfrm>
-            <a:off x="640080" y="1719072"/>
+            <a:off x="640080" y="1874519"/>
             <a:ext cx="4325112" cy="109728"/>
           </a:xfrm>
           <a:prstGeom prst="rect">
@@ -13145,7 +12991,7 @@
         </p:nvSpPr>
         <p:spPr>
           <a:xfrm>
-            <a:off x="640080" y="1828800"/>
+            <a:off x="640080" y="2002536"/>
             <a:ext cx="6133795" cy="109728"/>
           </a:xfrm>
           <a:prstGeom prst="rect">
@@ -13189,8 +13035,8 @@
         </p:nvSpPr>
         <p:spPr>
           <a:xfrm>
-            <a:off x="640080" y="2048256"/>
-            <a:ext cx="3840480" cy="201168"/>
+            <a:off x="640080" y="2167128"/>
+            <a:ext cx="3840480" cy="182880"/>
           </a:xfrm>
           <a:prstGeom prst="rect">
             <a:avLst/>
@@ -13224,8 +13070,8 @@
         </p:nvSpPr>
         <p:spPr>
           <a:xfrm>
-            <a:off x="4480560" y="2048256"/>
-            <a:ext cx="4023360" cy="201168"/>
+            <a:off x="4480560" y="2167128"/>
+            <a:ext cx="4023360" cy="182880"/>
           </a:xfrm>
           <a:prstGeom prst="rect">
             <a:avLst/>
@@ -13259,8 +13105,8 @@
         </p:nvSpPr>
         <p:spPr>
           <a:xfrm>
-            <a:off x="640080" y="2286000"/>
-            <a:ext cx="7863840" cy="164592"/>
+            <a:off x="640080" y="2377440"/>
+            <a:ext cx="7863840" cy="146304"/>
           </a:xfrm>
           <a:prstGeom prst="rect">
             <a:avLst/>
@@ -13288,14 +13134,49 @@
       </p:sp>
       <p:sp>
         <p:nvSpPr>
-          <p:cNvPr id="17" name="Rectangle 16"/>
+          <p:cNvPr id="17" name="TextBox 16"/>
+          <p:cNvSpPr txBox="1"/>
+          <p:nvPr/>
+        </p:nvSpPr>
+        <p:spPr>
+          <a:xfrm>
+            <a:off x="640080" y="2551176"/>
+            <a:ext cx="7863840" cy="146304"/>
+          </a:xfrm>
+          <a:prstGeom prst="rect">
+            <a:avLst/>
+          </a:prstGeom>
+          <a:noFill/>
+        </p:spPr>
+        <p:txBody>
+          <a:bodyPr wrap="square" lIns="0" rIns="0" tIns="0" bIns="0" anchor="t">
+            <a:spAutoFit/>
+          </a:bodyPr>
+          <a:lstStyle/>
+          <a:p>
+            <a:pPr algn="l"/>
+            <a:r>
+              <a:rPr sz="1000" b="0" i="0">
+                <a:solidFill>
+                  <a:srgbClr val="808080"/>
+                </a:solidFill>
+                <a:latin typeface="Aptos"/>
+              </a:rPr>
+              <a:t>Два сценария одного проекта на одной шкале — не сложение</a:t>
+            </a:r>
+          </a:p>
+        </p:txBody>
+      </p:sp>
+      <p:sp>
+        <p:nvSpPr>
+          <p:cNvPr id="18" name="Rectangle 17"/>
           <p:cNvSpPr/>
           <p:nvPr/>
         </p:nvSpPr>
         <p:spPr>
           <a:xfrm>
-            <a:off x="640080" y="2542032"/>
-            <a:ext cx="3831336" cy="1234440"/>
+            <a:off x="640080" y="2761488"/>
+            <a:ext cx="3831336" cy="1097280"/>
           </a:xfrm>
           <a:prstGeom prst="rect">
             <a:avLst/>
@@ -13332,13 +13213,13 @@
       </p:sp>
       <p:sp>
         <p:nvSpPr>
-          <p:cNvPr id="18" name="Rectangle 17"/>
+          <p:cNvPr id="19" name="Rectangle 18"/>
           <p:cNvSpPr/>
           <p:nvPr/>
         </p:nvSpPr>
         <p:spPr>
           <a:xfrm>
-            <a:off x="640080" y="2542032"/>
+            <a:off x="640080" y="2761488"/>
             <a:ext cx="3831336" cy="50292"/>
           </a:xfrm>
           <a:prstGeom prst="rect">
@@ -13376,13 +13257,13 @@
       </p:sp>
       <p:sp>
         <p:nvSpPr>
-          <p:cNvPr id="19" name="TextBox 18"/>
-          <p:cNvSpPr txBox="1"/>
-          <p:nvPr/>
-        </p:nvSpPr>
-        <p:spPr>
-          <a:xfrm>
-            <a:off x="786384" y="2670048"/>
+          <p:cNvPr id="20" name="TextBox 19"/>
+          <p:cNvSpPr txBox="1"/>
+          <p:nvPr/>
+        </p:nvSpPr>
+        <p:spPr>
+          <a:xfrm>
+            <a:off x="786384" y="2889504"/>
             <a:ext cx="3538728" cy="274320"/>
           </a:xfrm>
           <a:prstGeom prst="rect">
@@ -13411,14 +13292,14 @@
       </p:sp>
       <p:sp>
         <p:nvSpPr>
-          <p:cNvPr id="20" name="TextBox 19"/>
-          <p:cNvSpPr txBox="1"/>
-          <p:nvPr/>
-        </p:nvSpPr>
-        <p:spPr>
-          <a:xfrm>
-            <a:off x="786384" y="2962656"/>
-            <a:ext cx="3538728" cy="704088"/>
+          <p:cNvPr id="21" name="TextBox 20"/>
+          <p:cNvSpPr txBox="1"/>
+          <p:nvPr/>
+        </p:nvSpPr>
+        <p:spPr>
+          <a:xfrm>
+            <a:off x="786384" y="3182112"/>
+            <a:ext cx="3538728" cy="566927"/>
           </a:xfrm>
           <a:prstGeom prst="rect">
             <a:avLst/>
@@ -13450,14 +13331,14 @@
       </p:sp>
       <p:sp>
         <p:nvSpPr>
-          <p:cNvPr id="21" name="Rectangle 20"/>
+          <p:cNvPr id="22" name="Rectangle 21"/>
           <p:cNvSpPr/>
           <p:nvPr/>
         </p:nvSpPr>
         <p:spPr>
           <a:xfrm>
-            <a:off x="4672584" y="2542032"/>
-            <a:ext cx="3831336" cy="1234440"/>
+            <a:off x="4672584" y="2761488"/>
+            <a:ext cx="3831336" cy="1097280"/>
           </a:xfrm>
           <a:prstGeom prst="rect">
             <a:avLst/>
@@ -13494,13 +13375,13 @@
       </p:sp>
       <p:sp>
         <p:nvSpPr>
-          <p:cNvPr id="22" name="Rectangle 21"/>
+          <p:cNvPr id="23" name="Rectangle 22"/>
           <p:cNvSpPr/>
           <p:nvPr/>
         </p:nvSpPr>
         <p:spPr>
           <a:xfrm>
-            <a:off x="4672584" y="2542032"/>
+            <a:off x="4672584" y="2761488"/>
             <a:ext cx="3831336" cy="50292"/>
           </a:xfrm>
           <a:prstGeom prst="rect">
@@ -13538,13 +13419,13 @@
       </p:sp>
       <p:sp>
         <p:nvSpPr>
-          <p:cNvPr id="23" name="TextBox 22"/>
-          <p:cNvSpPr txBox="1"/>
-          <p:nvPr/>
-        </p:nvSpPr>
-        <p:spPr>
-          <a:xfrm>
-            <a:off x="4818888" y="2670048"/>
+          <p:cNvPr id="24" name="TextBox 23"/>
+          <p:cNvSpPr txBox="1"/>
+          <p:nvPr/>
+        </p:nvSpPr>
+        <p:spPr>
+          <a:xfrm>
+            <a:off x="4818888" y="2889504"/>
             <a:ext cx="3538728" cy="274320"/>
           </a:xfrm>
           <a:prstGeom prst="rect">
@@ -13573,14 +13454,14 @@
       </p:sp>
       <p:sp>
         <p:nvSpPr>
-          <p:cNvPr id="24" name="TextBox 23"/>
-          <p:cNvSpPr txBox="1"/>
-          <p:nvPr/>
-        </p:nvSpPr>
-        <p:spPr>
-          <a:xfrm>
-            <a:off x="4818888" y="2962656"/>
-            <a:ext cx="3538728" cy="704088"/>
+          <p:cNvPr id="25" name="TextBox 24"/>
+          <p:cNvSpPr txBox="1"/>
+          <p:nvPr/>
+        </p:nvSpPr>
+        <p:spPr>
+          <a:xfrm>
+            <a:off x="4818888" y="3182112"/>
+            <a:ext cx="3538728" cy="566927"/>
           </a:xfrm>
           <a:prstGeom prst="rect">
             <a:avLst/>
@@ -13612,7 +13493,7 @@
       </p:sp>
       <p:sp>
         <p:nvSpPr>
-          <p:cNvPr id="25" name="Rectangle 24"/>
+          <p:cNvPr id="26" name="Rectangle 25"/>
           <p:cNvSpPr/>
           <p:nvPr/>
         </p:nvSpPr>
@@ -13656,7 +13537,7 @@
       </p:sp>
       <p:sp>
         <p:nvSpPr>
-          <p:cNvPr id="26" name="Rectangle 25"/>
+          <p:cNvPr id="27" name="Rectangle 26"/>
           <p:cNvSpPr/>
           <p:nvPr/>
         </p:nvSpPr>
@@ -13700,7 +13581,7 @@
       </p:sp>
       <p:sp>
         <p:nvSpPr>
-          <p:cNvPr id="27" name="TextBox 26"/>
+          <p:cNvPr id="28" name="TextBox 27"/>
           <p:cNvSpPr txBox="1"/>
           <p:nvPr/>
         </p:nvSpPr>
@@ -13748,7 +13629,7 @@
       </p:sp>
       <p:sp>
         <p:nvSpPr>
-          <p:cNvPr id="28" name="TextBox 27"/>
+          <p:cNvPr id="29" name="TextBox 28"/>
           <p:cNvSpPr txBox="1"/>
           <p:nvPr/>
         </p:nvSpPr>
@@ -13783,7 +13664,7 @@
       </p:sp>
       <p:sp>
         <p:nvSpPr>
-          <p:cNvPr id="29" name="TextBox 28"/>
+          <p:cNvPr id="30" name="TextBox 29"/>
           <p:cNvSpPr txBox="1"/>
           <p:nvPr/>
         </p:nvSpPr>

--- a/Новое начало/Время партнёрских конструкций — внутренняя презентация (v2).pptx
+++ b/Новое начало/Время партнёрских конструкций — внутренняя презентация (v2).pptx
@@ -3945,7 +3945,7 @@
         </p:nvSpPr>
         <p:spPr>
           <a:xfrm>
-            <a:off x="3063240" y="1536192"/>
+            <a:off x="3063240" y="1481328"/>
             <a:ext cx="1097280" cy="201168"/>
           </a:xfrm>
           <a:prstGeom prst="rect">
@@ -3971,7 +3971,7 @@
                 </a:solidFill>
                 <a:latin typeface="Aptos"/>
               </a:rPr>
-              <a:t>акционерный риск — по утверждённому порядку</a:t>
+              <a:t>акционерный риск</a:t>
             </a:r>
           </a:p>
         </p:txBody>
@@ -3984,7 +3984,7 @@
         </p:nvSpPr>
         <p:spPr>
           <a:xfrm>
-            <a:off x="3063240" y="2084831"/>
+            <a:off x="3063240" y="2103120"/>
             <a:ext cx="1097280" cy="219456"/>
           </a:xfrm>
           <a:prstGeom prst="rect">
@@ -4006,7 +4006,7 @@
                 </a:solidFill>
                 <a:latin typeface="Aptos"/>
               </a:rPr>
-              <a:t>не просьба — регламент</a:t>
+              <a:t>по утверждённому порядку</a:t>
             </a:r>
           </a:p>
         </p:txBody>
